--- a/NidhiAI_Prototype_Submission.pptx
+++ b/NidhiAI_Prototype_Submission.pptx
@@ -3140,7 +3140,7 @@
               </a:defRPr>
             </a:pPr>
             <a:r>
-              <a:t>NidhiAI (निधिAI)</a:t>
+              <a:t>NidhiAI</a:t>
             </a:r>
           </a:p>
         </p:txBody>
@@ -3212,7 +3212,7 @@
               </a:defRPr>
             </a:pPr>
             <a:r>
-              <a:t>Unlocking Rs.38,000 Crore of CSR Capital for Bharat's Changemakers</a:t>
+              <a:t>AI-Powered CSR Funding Access for Grassroots NGOs</a:t>
             </a:r>
           </a:p>
         </p:txBody>
@@ -3363,11 +3363,11 @@
               </a:defRPr>
             </a:pPr>
             <a:r>
-              <a:t>Problem Statement: Track 03 — AI for Communities</a:t>
+              <a:t>Problem: The 'Last Mile' CSR Funding Gap</a:t>
             </a:r>
             <a:br/>
             <a:r>
-              <a:t>The 'Last Mile' CSR Funding Gap (90% Misallocation)</a:t>
+              <a:t>Track 03 — AI for Communities, Access &amp; Public Impact</a:t>
             </a:r>
           </a:p>
         </p:txBody>
@@ -3446,7 +3446,7 @@
               </a:defRPr>
             </a:pPr>
             <a:r>
-              <a:t>AI for Bharat Hackathon 2026  |  Powered by AWS  |  Track 03</a:t>
+              <a:t>Powered by AWS  |  AI for Bharat Hackathon 2026  |  Track 03</a:t>
             </a:r>
           </a:p>
         </p:txBody>
@@ -3551,7 +3551,7 @@
               </a:defRPr>
             </a:pPr>
             <a:r>
-              <a:t>Snapshots of the Working Prototype</a:t>
+              <a:t>More Prototype Screenshots</a:t>
             </a:r>
           </a:p>
         </p:txBody>
@@ -3582,7 +3582,7 @@
       </p:pic>
       <p:pic>
         <p:nvPicPr>
-          <p:cNvPr id="5" name="Picture 4" descr="landing_page_1772968848332.png"/>
+          <p:cNvPr id="5" name="Picture 4" descr="proposals_1772969030004.png"/>
           <p:cNvPicPr>
             <a:picLocks noChangeAspect="1"/>
           </p:cNvPicPr>
@@ -3613,7 +3613,7 @@
         <p:spPr>
           <a:xfrm>
             <a:off x="274320" y="4389120"/>
-            <a:ext cx="5760720" cy="365760"/>
+            <a:ext cx="5760720" cy="274320"/>
           </a:xfrm>
           <a:prstGeom prst="rect">
             <a:avLst/>
@@ -3627,7 +3627,7 @@
           <a:lstStyle/>
           <a:p>
             <a:pPr algn="ctr">
-              <a:defRPr sz="1100" b="0">
+              <a:defRPr sz="1000" b="0">
                 <a:solidFill>
                   <a:srgbClr val="8899AA"/>
                 </a:solidFill>
@@ -3635,7 +3635,7 @@
               </a:defRPr>
             </a:pPr>
             <a:r>
-              <a:t>CSR Assistant Chatbot — answers regulatory questions via KB</a:t>
+              <a:t>CSR Assistant Chatbot — answers regulatory questions</a:t>
             </a:r>
           </a:p>
         </p:txBody>
@@ -3649,7 +3649,7 @@
         <p:spPr>
           <a:xfrm>
             <a:off x="6217920" y="4389120"/>
-            <a:ext cx="5760720" cy="365760"/>
+            <a:ext cx="5760720" cy="274320"/>
           </a:xfrm>
           <a:prstGeom prst="rect">
             <a:avLst/>
@@ -3663,7 +3663,7 @@
           <a:lstStyle/>
           <a:p>
             <a:pPr algn="ctr">
-              <a:defRPr sz="1100" b="0">
+              <a:defRPr sz="1000" b="0">
                 <a:solidFill>
                   <a:srgbClr val="8899AA"/>
                 </a:solidFill>
@@ -3671,14 +3671,14 @@
               </a:defRPr>
             </a:pPr>
             <a:r>
-              <a:t>Landing Page — Initialize demo, sign in/up</a:t>
+              <a:t>Proposal Generator — livestreamed AI output</a:t>
             </a:r>
           </a:p>
         </p:txBody>
       </p:sp>
       <p:pic>
         <p:nvPicPr>
-          <p:cNvPr id="8" name="Picture 7" descr="upload_page_fixed_1772819311612.png"/>
+          <p:cNvPr id="8" name="Picture 7" descr="compliance_1772968882563.png"/>
           <p:cNvPicPr>
             <a:picLocks noChangeAspect="1"/>
           </p:cNvPicPr>
@@ -3692,8 +3692,8 @@
         </p:blipFill>
         <p:spPr>
           <a:xfrm>
-            <a:off x="274320" y="4937760"/>
-            <a:ext cx="3749039" cy="1371600"/>
+            <a:off x="274320" y="4846320"/>
+            <a:ext cx="5760720" cy="1280160"/>
           </a:xfrm>
           <a:prstGeom prst="rect">
             <a:avLst/>
@@ -3702,7 +3702,7 @@
       </p:pic>
       <p:pic>
         <p:nvPicPr>
-          <p:cNvPr id="9" name="Picture 8" descr="compliance_1772968882563.png"/>
+          <p:cNvPr id="9" name="Picture 8" descr="upload_page_fixed_1772819311612.png"/>
           <p:cNvPicPr>
             <a:picLocks noChangeAspect="1"/>
           </p:cNvPicPr>
@@ -3716,8 +3716,8 @@
         </p:blipFill>
         <p:spPr>
           <a:xfrm>
-            <a:off x="4206240" y="4937760"/>
-            <a:ext cx="3749039" cy="1371600"/>
+            <a:off x="6217920" y="4846320"/>
+            <a:ext cx="5760720" cy="1280160"/>
           </a:xfrm>
           <a:prstGeom prst="rect">
             <a:avLst/>
@@ -3798,7 +3798,7 @@
               </a:defRPr>
             </a:pPr>
             <a:r>
-              <a:t>All screenshots from the LIVE running prototype  |  Dark theme, responsive, production-quality UI</a:t>
+              <a:t>Live prototype — all features fully functional</a:t>
             </a:r>
           </a:p>
         </p:txBody>
@@ -3903,7 +3903,7 @@
               </a:defRPr>
             </a:pPr>
             <a:r>
-              <a:t>Prototype Performance Report / Benchmarking</a:t>
+              <a:t>Prototype Performance</a:t>
             </a:r>
           </a:p>
         </p:txBody>
@@ -3917,7 +3917,7 @@
         <p:spPr>
           <a:xfrm>
             <a:off x="457200" y="1188720"/>
-            <a:ext cx="5486400" cy="3657600"/>
+            <a:ext cx="5486400" cy="3200400"/>
           </a:xfrm>
           <a:prstGeom prst="roundRect">
             <a:avLst/>
@@ -3984,7 +3984,7 @@
               </a:defRPr>
             </a:pPr>
             <a:r>
-              <a:t>Latency (Live on AWS ap-south-1)</a:t>
+              <a:t>Response Latency (ap-south-1)</a:t>
             </a:r>
           </a:p>
         </p:txBody>
@@ -4004,7 +4004,7 @@
             <a:avLst/>
           </a:prstGeom>
           <a:solidFill>
-            <a:srgbClr val="1A3A5A"/>
+            <a:srgbClr val="0D1B2A"/>
           </a:solidFill>
           <a:ln>
             <a:noFill/>
@@ -4055,7 +4055,7 @@
           <a:lstStyle/>
           <a:p>
             <a:pPr algn="l">
-              <a:defRPr sz="1100" b="1">
+              <a:defRPr sz="1100" b="0">
                 <a:solidFill>
                   <a:srgbClr val="FFFFFF"/>
                 </a:solidFill>
@@ -4063,7 +4063,7 @@
               </a:defRPr>
             </a:pPr>
             <a:r>
-              <a:t>Document Upload to S3</a:t>
+              <a:t>Document upload to S3</a:t>
             </a:r>
           </a:p>
         </p:txBody>
@@ -4091,7 +4091,7 @@
           <a:lstStyle/>
           <a:p>
             <a:pPr algn="r">
-              <a:defRPr sz="1100" b="1">
+              <a:defRPr sz="1100" b="0">
                 <a:solidFill>
                   <a:srgbClr val="00D4AA"/>
                 </a:solidFill>
@@ -4178,7 +4178,7 @@
               </a:defRPr>
             </a:pPr>
             <a:r>
-              <a:t>Compliance Scan (Textract + Agent)</a:t>
+              <a:t>Compliance scan (Textract + Agent)</a:t>
             </a:r>
           </a:p>
         </p:txBody>
@@ -4293,7 +4293,7 @@
               </a:defRPr>
             </a:pPr>
             <a:r>
-              <a:t>Grant Matching (Titan V2 + AOSS)</a:t>
+              <a:t>Grant matching (semantic search)</a:t>
             </a:r>
           </a:p>
         </p:txBody>
@@ -4408,7 +4408,7 @@
               </a:defRPr>
             </a:pPr>
             <a:r>
-              <a:t>Proposal Generation (RAG + Claude)</a:t>
+              <a:t>Proposal generation (RAG + streaming)</a:t>
             </a:r>
           </a:p>
         </p:txBody>
@@ -4444,7 +4444,7 @@
               </a:defRPr>
             </a:pPr>
             <a:r>
-              <a:t>15-20s (streamed)</a:t>
+              <a:t>15-20 seconds</a:t>
             </a:r>
           </a:p>
         </p:txBody>
@@ -4523,7 +4523,7 @@
               </a:defRPr>
             </a:pPr>
             <a:r>
-              <a:t>KB Chatbot Response</a:t>
+              <a:t>CSR chatbot response</a:t>
             </a:r>
           </a:p>
         </p:txBody>
@@ -4566,129 +4566,14 @@
       </p:sp>
       <p:sp>
         <p:nvSpPr>
-          <p:cNvPr id="21" name="Rectangle 20"/>
+          <p:cNvPr id="21" name="Rounded Rectangle 20"/>
           <p:cNvSpPr/>
           <p:nvPr/>
         </p:nvSpPr>
         <p:spPr>
           <a:xfrm>
-            <a:off x="640080" y="3977639"/>
-            <a:ext cx="5029200" cy="411480"/>
-          </a:xfrm>
-          <a:prstGeom prst="rect">
-            <a:avLst/>
-          </a:prstGeom>
-          <a:solidFill>
-            <a:srgbClr val="14243B"/>
-          </a:solidFill>
-          <a:ln>
-            <a:noFill/>
-          </a:ln>
-        </p:spPr>
-        <p:style>
-          <a:lnRef idx="1">
-            <a:schemeClr val="accent1"/>
-          </a:lnRef>
-          <a:fillRef idx="3">
-            <a:schemeClr val="accent1"/>
-          </a:fillRef>
-          <a:effectRef idx="2">
-            <a:schemeClr val="accent1"/>
-          </a:effectRef>
-          <a:fontRef idx="minor">
-            <a:schemeClr val="lt1"/>
-          </a:fontRef>
-        </p:style>
-        <p:txBody>
-          <a:bodyPr rtlCol="0" anchor="ctr"/>
-          <a:lstStyle/>
-          <a:p>
-            <a:pPr algn="ctr"/>
-          </a:p>
-        </p:txBody>
-      </p:sp>
-      <p:sp>
-        <p:nvSpPr>
-          <p:cNvPr id="22" name="TextBox 21"/>
-          <p:cNvSpPr txBox="1"/>
-          <p:nvPr/>
-        </p:nvSpPr>
-        <p:spPr>
-          <a:xfrm>
-            <a:off x="777240" y="4005072"/>
-            <a:ext cx="2514600" cy="320040"/>
-          </a:xfrm>
-          <a:prstGeom prst="rect">
-            <a:avLst/>
-          </a:prstGeom>
-          <a:noFill/>
-        </p:spPr>
-        <p:txBody>
-          <a:bodyPr wrap="square">
-            <a:spAutoFit/>
-          </a:bodyPr>
-          <a:lstStyle/>
-          <a:p>
-            <a:pPr algn="l">
-              <a:defRPr sz="1100" b="0">
-                <a:solidFill>
-                  <a:srgbClr val="FFFFFF"/>
-                </a:solidFill>
-                <a:latin typeface="Calibri"/>
-              </a:defRPr>
-            </a:pPr>
-            <a:r>
-              <a:t>Lambda Cold Start</a:t>
-            </a:r>
-          </a:p>
-        </p:txBody>
-      </p:sp>
-      <p:sp>
-        <p:nvSpPr>
-          <p:cNvPr id="23" name="TextBox 22"/>
-          <p:cNvSpPr txBox="1"/>
-          <p:nvPr/>
-        </p:nvSpPr>
-        <p:spPr>
-          <a:xfrm>
-            <a:off x="3154680" y="4005072"/>
-            <a:ext cx="2263140" cy="320040"/>
-          </a:xfrm>
-          <a:prstGeom prst="rect">
-            <a:avLst/>
-          </a:prstGeom>
-          <a:noFill/>
-        </p:spPr>
-        <p:txBody>
-          <a:bodyPr wrap="square">
-            <a:spAutoFit/>
-          </a:bodyPr>
-          <a:lstStyle/>
-          <a:p>
-            <a:pPr algn="r">
-              <a:defRPr sz="1100" b="0">
-                <a:solidFill>
-                  <a:srgbClr val="00D4AA"/>
-                </a:solidFill>
-                <a:latin typeface="Calibri"/>
-              </a:defRPr>
-            </a:pPr>
-            <a:r>
-              <a:t>&lt; 800ms</a:t>
-            </a:r>
-          </a:p>
-        </p:txBody>
-      </p:sp>
-      <p:sp>
-        <p:nvSpPr>
-          <p:cNvPr id="24" name="Rounded Rectangle 23"/>
-          <p:cNvSpPr/>
-          <p:nvPr/>
-        </p:nvSpPr>
-        <p:spPr>
-          <a:xfrm>
             <a:off x="6400800" y="1188720"/>
-            <a:ext cx="5303520" cy="3657600"/>
+            <a:ext cx="5303520" cy="3200400"/>
           </a:xfrm>
           <a:prstGeom prst="roundRect">
             <a:avLst/>
@@ -4726,7 +4611,7 @@
       </p:sp>
       <p:sp>
         <p:nvSpPr>
-          <p:cNvPr id="25" name="TextBox 24"/>
+          <p:cNvPr id="22" name="TextBox 21"/>
           <p:cNvSpPr txBox="1"/>
           <p:nvPr/>
         </p:nvSpPr>
@@ -4755,64 +4640,21 @@
               </a:defRPr>
             </a:pPr>
             <a:r>
-              <a:t>Infrastructure Status</a:t>
-            </a:r>
-          </a:p>
-        </p:txBody>
-      </p:sp>
-      <p:sp>
-        <p:nvSpPr>
-          <p:cNvPr id="26" name="Rectangle 25"/>
-          <p:cNvSpPr/>
+              <a:t>How Streaming Works</a:t>
+            </a:r>
+          </a:p>
+        </p:txBody>
+      </p:sp>
+      <p:sp>
+        <p:nvSpPr>
+          <p:cNvPr id="23" name="TextBox 22"/>
+          <p:cNvSpPr txBox="1"/>
           <p:nvPr/>
         </p:nvSpPr>
         <p:spPr>
           <a:xfrm>
             <a:off x="6583680" y="1828800"/>
-            <a:ext cx="4846320" cy="384048"/>
-          </a:xfrm>
-          <a:prstGeom prst="rect">
-            <a:avLst/>
-          </a:prstGeom>
-          <a:solidFill>
-            <a:srgbClr val="1A3A5A"/>
-          </a:solidFill>
-          <a:ln>
-            <a:noFill/>
-          </a:ln>
-        </p:spPr>
-        <p:style>
-          <a:lnRef idx="1">
-            <a:schemeClr val="accent1"/>
-          </a:lnRef>
-          <a:fillRef idx="3">
-            <a:schemeClr val="accent1"/>
-          </a:fillRef>
-          <a:effectRef idx="2">
-            <a:schemeClr val="accent1"/>
-          </a:effectRef>
-          <a:fontRef idx="minor">
-            <a:schemeClr val="lt1"/>
-          </a:fontRef>
-        </p:style>
-        <p:txBody>
-          <a:bodyPr rtlCol="0" anchor="ctr"/>
-          <a:lstStyle/>
-          <a:p>
-            <a:pPr algn="ctr"/>
-          </a:p>
-        </p:txBody>
-      </p:sp>
-      <p:sp>
-        <p:nvSpPr>
-          <p:cNvPr id="27" name="TextBox 26"/>
-          <p:cNvSpPr txBox="1"/>
-          <p:nvPr/>
-        </p:nvSpPr>
-        <p:spPr>
-          <a:xfrm>
-            <a:off x="6675120" y="1856231"/>
-            <a:ext cx="2560320" cy="320040"/>
+            <a:ext cx="4846320" cy="2286000"/>
           </a:xfrm>
           <a:prstGeom prst="rect">
             <a:avLst/>
@@ -4825,8 +4667,11 @@
           </a:bodyPr>
           <a:lstStyle/>
           <a:p>
-            <a:pPr algn="l">
-              <a:defRPr sz="1100" b="0">
+            <a:pPr>
+              <a:spcAft>
+                <a:spcPts val="400"/>
+              </a:spcAft>
+              <a:defRPr sz="1100">
                 <a:solidFill>
                   <a:srgbClr val="FFFFFF"/>
                 </a:solidFill>
@@ -4834,59 +4679,151 @@
               </a:defRPr>
             </a:pPr>
             <a:r>
-              <a:t>Bedrock Agents (5/5)</a:t>
-            </a:r>
-          </a:p>
-        </p:txBody>
-      </p:sp>
-      <p:sp>
-        <p:nvSpPr>
-          <p:cNvPr id="28" name="TextBox 27"/>
-          <p:cNvSpPr txBox="1"/>
-          <p:nvPr/>
-        </p:nvSpPr>
-        <p:spPr>
-          <a:xfrm>
-            <a:off x="9326880" y="1856231"/>
-            <a:ext cx="1920240" cy="320040"/>
-          </a:xfrm>
-          <a:prstGeom prst="rect">
-            <a:avLst/>
-          </a:prstGeom>
-          <a:noFill/>
-        </p:spPr>
-        <p:txBody>
-          <a:bodyPr wrap="square">
-            <a:spAutoFit/>
-          </a:bodyPr>
-          <a:lstStyle/>
-          <a:p>
-            <a:pPr algn="r">
-              <a:defRPr sz="1100" b="1">
-                <a:solidFill>
-                  <a:srgbClr val="00CC66"/>
-                </a:solidFill>
-                <a:latin typeface="Calibri"/>
-              </a:defRPr>
-            </a:pPr>
-            <a:r>
-              <a:t>PREPARED</a:t>
-            </a:r>
-          </a:p>
-        </p:txBody>
-      </p:sp>
-      <p:sp>
-        <p:nvSpPr>
-          <p:cNvPr id="29" name="Rectangle 28"/>
+              <a:t>  Proposal and report generation use server-side</a:t>
+            </a:r>
+          </a:p>
+          <a:p>
+            <a:pPr>
+              <a:spcAft>
+                <a:spcPts val="400"/>
+              </a:spcAft>
+              <a:defRPr sz="1100">
+                <a:solidFill>
+                  <a:srgbClr val="FFFFFF"/>
+                </a:solidFill>
+                <a:latin typeface="Calibri"/>
+              </a:defRPr>
+            </a:pPr>
+            <a:r>
+              <a:t>  streaming — the output appears on screen as</a:t>
+            </a:r>
+          </a:p>
+          <a:p>
+            <a:pPr>
+              <a:spcAft>
+                <a:spcPts val="400"/>
+              </a:spcAft>
+              <a:defRPr sz="1100">
+                <a:solidFill>
+                  <a:srgbClr val="FFFFFF"/>
+                </a:solidFill>
+                <a:latin typeface="Calibri"/>
+              </a:defRPr>
+            </a:pPr>
+            <a:r>
+              <a:t>  the model writes, so the user sees results</a:t>
+            </a:r>
+          </a:p>
+          <a:p>
+            <a:pPr>
+              <a:spcAft>
+                <a:spcPts val="400"/>
+              </a:spcAft>
+              <a:defRPr sz="1100">
+                <a:solidFill>
+                  <a:srgbClr val="FFFFFF"/>
+                </a:solidFill>
+                <a:latin typeface="Calibri"/>
+              </a:defRPr>
+            </a:pPr>
+            <a:r>
+              <a:t>  immediately rather than waiting 15-20 seconds.</a:t>
+            </a:r>
+          </a:p>
+          <a:p>
+            <a:pPr>
+              <a:spcAft>
+                <a:spcPts val="400"/>
+              </a:spcAft>
+              <a:defRPr sz="1100">
+                <a:solidFill>
+                  <a:srgbClr val="FFFFFF"/>
+                </a:solidFill>
+                <a:latin typeface="Calibri"/>
+              </a:defRPr>
+            </a:pPr>
+            <a:r>
+              <a:t>  </a:t>
+            </a:r>
+          </a:p>
+          <a:p>
+            <a:pPr>
+              <a:spcAft>
+                <a:spcPts val="400"/>
+              </a:spcAft>
+              <a:defRPr sz="1100">
+                <a:solidFill>
+                  <a:srgbClr val="FFFFFF"/>
+                </a:solidFill>
+                <a:latin typeface="Calibri"/>
+              </a:defRPr>
+            </a:pPr>
+            <a:r>
+              <a:t>  The Agent Trace panel shows the Supervisor's</a:t>
+            </a:r>
+          </a:p>
+          <a:p>
+            <a:pPr>
+              <a:spcAft>
+                <a:spcPts val="400"/>
+              </a:spcAft>
+              <a:defRPr sz="1100">
+                <a:solidFill>
+                  <a:srgbClr val="FFFFFF"/>
+                </a:solidFill>
+                <a:latin typeface="Calibri"/>
+              </a:defRPr>
+            </a:pPr>
+            <a:r>
+              <a:t>  decision-making live: which sub-agent was</a:t>
+            </a:r>
+          </a:p>
+          <a:p>
+            <a:pPr>
+              <a:spcAft>
+                <a:spcPts val="400"/>
+              </a:spcAft>
+              <a:defRPr sz="1100">
+                <a:solidFill>
+                  <a:srgbClr val="FFFFFF"/>
+                </a:solidFill>
+                <a:latin typeface="Calibri"/>
+              </a:defRPr>
+            </a:pPr>
+            <a:r>
+              <a:t>  called, what Knowledge Base was queried,</a:t>
+            </a:r>
+          </a:p>
+          <a:p>
+            <a:pPr>
+              <a:spcAft>
+                <a:spcPts val="400"/>
+              </a:spcAft>
+              <a:defRPr sz="1100">
+                <a:solidFill>
+                  <a:srgbClr val="FFFFFF"/>
+                </a:solidFill>
+                <a:latin typeface="Calibri"/>
+              </a:defRPr>
+            </a:pPr>
+            <a:r>
+              <a:t>  and what data was returned.</a:t>
+            </a:r>
+          </a:p>
+        </p:txBody>
+      </p:sp>
+      <p:sp>
+        <p:nvSpPr>
+          <p:cNvPr id="24" name="Rounded Rectangle 23"/>
           <p:cNvSpPr/>
           <p:nvPr/>
         </p:nvSpPr>
         <p:spPr>
           <a:xfrm>
-            <a:off x="6583680" y="2258568"/>
-            <a:ext cx="4846320" cy="384048"/>
-          </a:xfrm>
-          <a:prstGeom prst="rect">
+            <a:off x="457200" y="4754880"/>
+            <a:ext cx="11277295" cy="1188720"/>
+          </a:xfrm>
+          <a:prstGeom prst="roundRect">
             <a:avLst/>
           </a:prstGeom>
           <a:solidFill>
@@ -4920,14 +4857,14 @@
       </p:sp>
       <p:sp>
         <p:nvSpPr>
-          <p:cNvPr id="30" name="TextBox 29"/>
+          <p:cNvPr id="25" name="TextBox 24"/>
           <p:cNvSpPr txBox="1"/>
           <p:nvPr/>
         </p:nvSpPr>
         <p:spPr>
           <a:xfrm>
-            <a:off x="6675120" y="2285999"/>
-            <a:ext cx="2560320" cy="320040"/>
+            <a:off x="731520" y="4892040"/>
+            <a:ext cx="3657600" cy="822960"/>
           </a:xfrm>
           <a:prstGeom prst="rect">
             <a:avLst/>
@@ -4940,30 +4877,34 @@
           </a:bodyPr>
           <a:lstStyle/>
           <a:p>
-            <a:pPr algn="l">
-              <a:defRPr sz="1100" b="0">
-                <a:solidFill>
-                  <a:srgbClr val="FFFFFF"/>
-                </a:solidFill>
-                <a:latin typeface="Calibri"/>
-              </a:defRPr>
-            </a:pPr>
-            <a:r>
-              <a:t>Knowledge Bases (3/3)</a:t>
-            </a:r>
-          </a:p>
-        </p:txBody>
-      </p:sp>
-      <p:sp>
-        <p:nvSpPr>
-          <p:cNvPr id="31" name="TextBox 30"/>
+            <a:pPr algn="ctr">
+              <a:defRPr sz="1400" b="1">
+                <a:solidFill>
+                  <a:srgbClr val="FF9933"/>
+                </a:solidFill>
+                <a:latin typeface="Calibri"/>
+              </a:defRPr>
+            </a:pPr>
+            <a:r>
+              <a:t>100% Serverless</a:t>
+            </a:r>
+            <a:br/>
+            <a:r>
+              <a:t>Auto-scales with demand</a:t>
+            </a:r>
+          </a:p>
+        </p:txBody>
+      </p:sp>
+      <p:sp>
+        <p:nvSpPr>
+          <p:cNvPr id="26" name="TextBox 25"/>
           <p:cNvSpPr txBox="1"/>
           <p:nvPr/>
         </p:nvSpPr>
         <p:spPr>
           <a:xfrm>
-            <a:off x="9326880" y="2285999"/>
-            <a:ext cx="1920240" cy="320040"/>
+            <a:off x="4389120" y="4892040"/>
+            <a:ext cx="3657600" cy="822960"/>
           </a:xfrm>
           <a:prstGeom prst="rect">
             <a:avLst/>
@@ -4976,73 +4917,34 @@
           </a:bodyPr>
           <a:lstStyle/>
           <a:p>
-            <a:pPr algn="r">
-              <a:defRPr sz="1100" b="1">
-                <a:solidFill>
-                  <a:srgbClr val="00CC66"/>
-                </a:solidFill>
-                <a:latin typeface="Calibri"/>
-              </a:defRPr>
-            </a:pPr>
-            <a:r>
-              <a:t>ACTIVE</a:t>
-            </a:r>
-          </a:p>
-        </p:txBody>
-      </p:sp>
-      <p:sp>
-        <p:nvSpPr>
-          <p:cNvPr id="32" name="Rectangle 31"/>
-          <p:cNvSpPr/>
-          <p:nvPr/>
-        </p:nvSpPr>
-        <p:spPr>
-          <a:xfrm>
-            <a:off x="6583680" y="2688336"/>
-            <a:ext cx="4846320" cy="384048"/>
-          </a:xfrm>
-          <a:prstGeom prst="rect">
-            <a:avLst/>
-          </a:prstGeom>
-          <a:solidFill>
-            <a:srgbClr val="0D1B2A"/>
-          </a:solidFill>
-          <a:ln>
-            <a:noFill/>
-          </a:ln>
-        </p:spPr>
-        <p:style>
-          <a:lnRef idx="1">
-            <a:schemeClr val="accent1"/>
-          </a:lnRef>
-          <a:fillRef idx="3">
-            <a:schemeClr val="accent1"/>
-          </a:fillRef>
-          <a:effectRef idx="2">
-            <a:schemeClr val="accent1"/>
-          </a:effectRef>
-          <a:fontRef idx="minor">
-            <a:schemeClr val="lt1"/>
-          </a:fontRef>
-        </p:style>
-        <p:txBody>
-          <a:bodyPr rtlCol="0" anchor="ctr"/>
-          <a:lstStyle/>
-          <a:p>
-            <a:pPr algn="ctr"/>
-          </a:p>
-        </p:txBody>
-      </p:sp>
-      <p:sp>
-        <p:nvSpPr>
-          <p:cNvPr id="33" name="TextBox 32"/>
+            <a:pPr algn="ctr">
+              <a:defRPr sz="1400" b="1">
+                <a:solidFill>
+                  <a:srgbClr val="FF9933"/>
+                </a:solidFill>
+                <a:latin typeface="Calibri"/>
+              </a:defRPr>
+            </a:pPr>
+            <a:r>
+              <a:t>12 AWS Services</a:t>
+            </a:r>
+            <a:br/>
+            <a:r>
+              <a:t>All managed, no self-hosting</a:t>
+            </a:r>
+          </a:p>
+        </p:txBody>
+      </p:sp>
+      <p:sp>
+        <p:nvSpPr>
+          <p:cNvPr id="27" name="TextBox 26"/>
           <p:cNvSpPr txBox="1"/>
           <p:nvPr/>
         </p:nvSpPr>
         <p:spPr>
           <a:xfrm>
-            <a:off x="6675120" y="2715768"/>
-            <a:ext cx="2560320" cy="320040"/>
+            <a:off x="8046720" y="4892040"/>
+            <a:ext cx="3657600" cy="822960"/>
           </a:xfrm>
           <a:prstGeom prst="rect">
             <a:avLst/>
@@ -5055,66 +4957,34 @@
           </a:bodyPr>
           <a:lstStyle/>
           <a:p>
-            <a:pPr algn="l">
-              <a:defRPr sz="1100" b="0">
-                <a:solidFill>
-                  <a:srgbClr val="FFFFFF"/>
-                </a:solidFill>
-                <a:latin typeface="Calibri"/>
-              </a:defRPr>
-            </a:pPr>
-            <a:r>
-              <a:t>KB Sync (18 docs)</a:t>
-            </a:r>
-          </a:p>
-        </p:txBody>
-      </p:sp>
-      <p:sp>
-        <p:nvSpPr>
-          <p:cNvPr id="34" name="TextBox 33"/>
-          <p:cNvSpPr txBox="1"/>
-          <p:nvPr/>
-        </p:nvSpPr>
-        <p:spPr>
-          <a:xfrm>
-            <a:off x="9326880" y="2715768"/>
-            <a:ext cx="1920240" cy="320040"/>
-          </a:xfrm>
-          <a:prstGeom prst="rect">
-            <a:avLst/>
-          </a:prstGeom>
-          <a:noFill/>
-        </p:spPr>
-        <p:txBody>
-          <a:bodyPr wrap="square">
-            <a:spAutoFit/>
-          </a:bodyPr>
-          <a:lstStyle/>
-          <a:p>
-            <a:pPr algn="r">
-              <a:defRPr sz="1100" b="1">
-                <a:solidFill>
-                  <a:srgbClr val="00CC66"/>
-                </a:solidFill>
-                <a:latin typeface="Calibri"/>
-              </a:defRPr>
-            </a:pPr>
-            <a:r>
-              <a:t>0 failures</a:t>
-            </a:r>
-          </a:p>
-        </p:txBody>
-      </p:sp>
-      <p:sp>
-        <p:nvSpPr>
-          <p:cNvPr id="35" name="Rectangle 34"/>
+            <a:pPr algn="ctr">
+              <a:defRPr sz="1400" b="1">
+                <a:solidFill>
+                  <a:srgbClr val="FF9933"/>
+                </a:solidFill>
+                <a:latin typeface="Calibri"/>
+              </a:defRPr>
+            </a:pPr>
+            <a:r>
+              <a:t>Real-time Streaming</a:t>
+            </a:r>
+            <a:br/>
+            <a:r>
+              <a:t>Live AI output to browser</a:t>
+            </a:r>
+          </a:p>
+        </p:txBody>
+      </p:sp>
+      <p:sp>
+        <p:nvSpPr>
+          <p:cNvPr id="28" name="Rectangle 27"/>
           <p:cNvSpPr/>
           <p:nvPr/>
         </p:nvSpPr>
         <p:spPr>
           <a:xfrm>
-            <a:off x="6583680" y="3118104"/>
-            <a:ext cx="4846320" cy="384048"/>
+            <a:off x="0" y="6309360"/>
+            <a:ext cx="12191695" cy="548640"/>
           </a:xfrm>
           <a:prstGeom prst="rect">
             <a:avLst/>
@@ -5150,14 +5020,14 @@
       </p:sp>
       <p:sp>
         <p:nvSpPr>
-          <p:cNvPr id="36" name="TextBox 35"/>
+          <p:cNvPr id="29" name="TextBox 28"/>
           <p:cNvSpPr txBox="1"/>
           <p:nvPr/>
         </p:nvSpPr>
         <p:spPr>
           <a:xfrm>
-            <a:off x="6675120" y="3145536"/>
-            <a:ext cx="2560320" cy="320040"/>
+            <a:off x="457200" y="6355080"/>
+            <a:ext cx="10972800" cy="365760"/>
           </a:xfrm>
           <a:prstGeom prst="rect">
             <a:avLst/>
@@ -5170,514 +5040,6 @@
           </a:bodyPr>
           <a:lstStyle/>
           <a:p>
-            <a:pPr algn="l">
-              <a:defRPr sz="1100" b="0">
-                <a:solidFill>
-                  <a:srgbClr val="FFFFFF"/>
-                </a:solidFill>
-                <a:latin typeface="Calibri"/>
-              </a:defRPr>
-            </a:pPr>
-            <a:r>
-              <a:t>Lambda Functions (4/4)</a:t>
-            </a:r>
-          </a:p>
-        </p:txBody>
-      </p:sp>
-      <p:sp>
-        <p:nvSpPr>
-          <p:cNvPr id="37" name="TextBox 36"/>
-          <p:cNvSpPr txBox="1"/>
-          <p:nvPr/>
-        </p:nvSpPr>
-        <p:spPr>
-          <a:xfrm>
-            <a:off x="9326880" y="3145536"/>
-            <a:ext cx="1920240" cy="320040"/>
-          </a:xfrm>
-          <a:prstGeom prst="rect">
-            <a:avLst/>
-          </a:prstGeom>
-          <a:noFill/>
-        </p:spPr>
-        <p:txBody>
-          <a:bodyPr wrap="square">
-            <a:spAutoFit/>
-          </a:bodyPr>
-          <a:lstStyle/>
-          <a:p>
-            <a:pPr algn="r">
-              <a:defRPr sz="1100" b="1">
-                <a:solidFill>
-                  <a:srgbClr val="00CC66"/>
-                </a:solidFill>
-                <a:latin typeface="Calibri"/>
-              </a:defRPr>
-            </a:pPr>
-            <a:r>
-              <a:t>Active</a:t>
-            </a:r>
-          </a:p>
-        </p:txBody>
-      </p:sp>
-      <p:sp>
-        <p:nvSpPr>
-          <p:cNvPr id="38" name="Rectangle 37"/>
-          <p:cNvSpPr/>
-          <p:nvPr/>
-        </p:nvSpPr>
-        <p:spPr>
-          <a:xfrm>
-            <a:off x="6583680" y="3547872"/>
-            <a:ext cx="4846320" cy="384048"/>
-          </a:xfrm>
-          <a:prstGeom prst="rect">
-            <a:avLst/>
-          </a:prstGeom>
-          <a:solidFill>
-            <a:srgbClr val="0D1B2A"/>
-          </a:solidFill>
-          <a:ln>
-            <a:noFill/>
-          </a:ln>
-        </p:spPr>
-        <p:style>
-          <a:lnRef idx="1">
-            <a:schemeClr val="accent1"/>
-          </a:lnRef>
-          <a:fillRef idx="3">
-            <a:schemeClr val="accent1"/>
-          </a:fillRef>
-          <a:effectRef idx="2">
-            <a:schemeClr val="accent1"/>
-          </a:effectRef>
-          <a:fontRef idx="minor">
-            <a:schemeClr val="lt1"/>
-          </a:fontRef>
-        </p:style>
-        <p:txBody>
-          <a:bodyPr rtlCol="0" anchor="ctr"/>
-          <a:lstStyle/>
-          <a:p>
-            <a:pPr algn="ctr"/>
-          </a:p>
-        </p:txBody>
-      </p:sp>
-      <p:sp>
-        <p:nvSpPr>
-          <p:cNvPr id="39" name="TextBox 38"/>
-          <p:cNvSpPr txBox="1"/>
-          <p:nvPr/>
-        </p:nvSpPr>
-        <p:spPr>
-          <a:xfrm>
-            <a:off x="6675120" y="3575303"/>
-            <a:ext cx="2560320" cy="320040"/>
-          </a:xfrm>
-          <a:prstGeom prst="rect">
-            <a:avLst/>
-          </a:prstGeom>
-          <a:noFill/>
-        </p:spPr>
-        <p:txBody>
-          <a:bodyPr wrap="square">
-            <a:spAutoFit/>
-          </a:bodyPr>
-          <a:lstStyle/>
-          <a:p>
-            <a:pPr algn="l">
-              <a:defRPr sz="1100" b="0">
-                <a:solidFill>
-                  <a:srgbClr val="FFFFFF"/>
-                </a:solidFill>
-                <a:latin typeface="Calibri"/>
-              </a:defRPr>
-            </a:pPr>
-            <a:r>
-              <a:t>System Availability</a:t>
-            </a:r>
-          </a:p>
-        </p:txBody>
-      </p:sp>
-      <p:sp>
-        <p:nvSpPr>
-          <p:cNvPr id="40" name="TextBox 39"/>
-          <p:cNvSpPr txBox="1"/>
-          <p:nvPr/>
-        </p:nvSpPr>
-        <p:spPr>
-          <a:xfrm>
-            <a:off x="9326880" y="3575303"/>
-            <a:ext cx="1920240" cy="320040"/>
-          </a:xfrm>
-          <a:prstGeom prst="rect">
-            <a:avLst/>
-          </a:prstGeom>
-          <a:noFill/>
-        </p:spPr>
-        <p:txBody>
-          <a:bodyPr wrap="square">
-            <a:spAutoFit/>
-          </a:bodyPr>
-          <a:lstStyle/>
-          <a:p>
-            <a:pPr algn="r">
-              <a:defRPr sz="1100" b="1">
-                <a:solidFill>
-                  <a:srgbClr val="00CC66"/>
-                </a:solidFill>
-                <a:latin typeface="Calibri"/>
-              </a:defRPr>
-            </a:pPr>
-            <a:r>
-              <a:t>100%</a:t>
-            </a:r>
-          </a:p>
-        </p:txBody>
-      </p:sp>
-      <p:sp>
-        <p:nvSpPr>
-          <p:cNvPr id="41" name="Rectangle 40"/>
-          <p:cNvSpPr/>
-          <p:nvPr/>
-        </p:nvSpPr>
-        <p:spPr>
-          <a:xfrm>
-            <a:off x="6583680" y="3977639"/>
-            <a:ext cx="4846320" cy="384048"/>
-          </a:xfrm>
-          <a:prstGeom prst="rect">
-            <a:avLst/>
-          </a:prstGeom>
-          <a:solidFill>
-            <a:srgbClr val="14243B"/>
-          </a:solidFill>
-          <a:ln>
-            <a:noFill/>
-          </a:ln>
-        </p:spPr>
-        <p:style>
-          <a:lnRef idx="1">
-            <a:schemeClr val="accent1"/>
-          </a:lnRef>
-          <a:fillRef idx="3">
-            <a:schemeClr val="accent1"/>
-          </a:fillRef>
-          <a:effectRef idx="2">
-            <a:schemeClr val="accent1"/>
-          </a:effectRef>
-          <a:fontRef idx="minor">
-            <a:schemeClr val="lt1"/>
-          </a:fontRef>
-        </p:style>
-        <p:txBody>
-          <a:bodyPr rtlCol="0" anchor="ctr"/>
-          <a:lstStyle/>
-          <a:p>
-            <a:pPr algn="ctr"/>
-          </a:p>
-        </p:txBody>
-      </p:sp>
-      <p:sp>
-        <p:nvSpPr>
-          <p:cNvPr id="42" name="TextBox 41"/>
-          <p:cNvSpPr txBox="1"/>
-          <p:nvPr/>
-        </p:nvSpPr>
-        <p:spPr>
-          <a:xfrm>
-            <a:off x="6675120" y="4005072"/>
-            <a:ext cx="2560320" cy="320040"/>
-          </a:xfrm>
-          <a:prstGeom prst="rect">
-            <a:avLst/>
-          </a:prstGeom>
-          <a:noFill/>
-        </p:spPr>
-        <p:txBody>
-          <a:bodyPr wrap="square">
-            <a:spAutoFit/>
-          </a:bodyPr>
-          <a:lstStyle/>
-          <a:p>
-            <a:pPr algn="l">
-              <a:defRPr sz="1100" b="0">
-                <a:solidFill>
-                  <a:srgbClr val="FFFFFF"/>
-                </a:solidFill>
-                <a:latin typeface="Calibri"/>
-              </a:defRPr>
-            </a:pPr>
-            <a:r>
-              <a:t>Concurrent Scaling</a:t>
-            </a:r>
-          </a:p>
-        </p:txBody>
-      </p:sp>
-      <p:sp>
-        <p:nvSpPr>
-          <p:cNvPr id="43" name="TextBox 42"/>
-          <p:cNvSpPr txBox="1"/>
-          <p:nvPr/>
-        </p:nvSpPr>
-        <p:spPr>
-          <a:xfrm>
-            <a:off x="9326880" y="4005072"/>
-            <a:ext cx="1920240" cy="320040"/>
-          </a:xfrm>
-          <a:prstGeom prst="rect">
-            <a:avLst/>
-          </a:prstGeom>
-          <a:noFill/>
-        </p:spPr>
-        <p:txBody>
-          <a:bodyPr wrap="square">
-            <a:spAutoFit/>
-          </a:bodyPr>
-          <a:lstStyle/>
-          <a:p>
-            <a:pPr algn="r">
-              <a:defRPr sz="1100" b="1">
-                <a:solidFill>
-                  <a:srgbClr val="00D4AA"/>
-                </a:solidFill>
-                <a:latin typeface="Calibri"/>
-              </a:defRPr>
-            </a:pPr>
-            <a:r>
-              <a:t>Auto (Lambda)</a:t>
-            </a:r>
-          </a:p>
-        </p:txBody>
-      </p:sp>
-      <p:sp>
-        <p:nvSpPr>
-          <p:cNvPr id="44" name="Rounded Rectangle 43"/>
-          <p:cNvSpPr/>
-          <p:nvPr/>
-        </p:nvSpPr>
-        <p:spPr>
-          <a:xfrm>
-            <a:off x="457200" y="5120640"/>
-            <a:ext cx="11277295" cy="914400"/>
-          </a:xfrm>
-          <a:prstGeom prst="roundRect">
-            <a:avLst/>
-          </a:prstGeom>
-          <a:solidFill>
-            <a:srgbClr val="14243B"/>
-          </a:solidFill>
-          <a:ln>
-            <a:noFill/>
-          </a:ln>
-        </p:spPr>
-        <p:style>
-          <a:lnRef idx="1">
-            <a:schemeClr val="accent1"/>
-          </a:lnRef>
-          <a:fillRef idx="3">
-            <a:schemeClr val="accent1"/>
-          </a:fillRef>
-          <a:effectRef idx="2">
-            <a:schemeClr val="accent1"/>
-          </a:effectRef>
-          <a:fontRef idx="minor">
-            <a:schemeClr val="lt1"/>
-          </a:fontRef>
-        </p:style>
-        <p:txBody>
-          <a:bodyPr rtlCol="0" anchor="ctr"/>
-          <a:lstStyle/>
-          <a:p>
-            <a:pPr algn="ctr"/>
-          </a:p>
-        </p:txBody>
-      </p:sp>
-      <p:sp>
-        <p:nvSpPr>
-          <p:cNvPr id="45" name="TextBox 44"/>
-          <p:cNvSpPr txBox="1"/>
-          <p:nvPr/>
-        </p:nvSpPr>
-        <p:spPr>
-          <a:xfrm>
-            <a:off x="731520" y="5257800"/>
-            <a:ext cx="3657600" cy="640080"/>
-          </a:xfrm>
-          <a:prstGeom prst="rect">
-            <a:avLst/>
-          </a:prstGeom>
-          <a:noFill/>
-        </p:spPr>
-        <p:txBody>
-          <a:bodyPr wrap="square">
-            <a:spAutoFit/>
-          </a:bodyPr>
-          <a:lstStyle/>
-          <a:p>
-            <a:pPr algn="ctr">
-              <a:defRPr sz="1400" b="1">
-                <a:solidFill>
-                  <a:srgbClr val="FF9933"/>
-                </a:solidFill>
-                <a:latin typeface="Calibri"/>
-              </a:defRPr>
-            </a:pPr>
-            <a:r>
-              <a:t>4 Lambda Functions</a:t>
-            </a:r>
-            <a:br/>
-            <a:r>
-              <a:t>Python 3.12, 256MB</a:t>
-            </a:r>
-          </a:p>
-        </p:txBody>
-      </p:sp>
-      <p:sp>
-        <p:nvSpPr>
-          <p:cNvPr id="46" name="TextBox 45"/>
-          <p:cNvSpPr txBox="1"/>
-          <p:nvPr/>
-        </p:nvSpPr>
-        <p:spPr>
-          <a:xfrm>
-            <a:off x="4389120" y="5257800"/>
-            <a:ext cx="3657600" cy="640080"/>
-          </a:xfrm>
-          <a:prstGeom prst="rect">
-            <a:avLst/>
-          </a:prstGeom>
-          <a:noFill/>
-        </p:spPr>
-        <p:txBody>
-          <a:bodyPr wrap="square">
-            <a:spAutoFit/>
-          </a:bodyPr>
-          <a:lstStyle/>
-          <a:p>
-            <a:pPr algn="ctr">
-              <a:defRPr sz="1400" b="1">
-                <a:solidFill>
-                  <a:srgbClr val="FF9933"/>
-                </a:solidFill>
-                <a:latin typeface="Calibri"/>
-              </a:defRPr>
-            </a:pPr>
-            <a:r>
-              <a:t>5 S3 Buckets</a:t>
-            </a:r>
-            <a:br/>
-            <a:r>
-              <a:t>4 DynamoDB Tables</a:t>
-            </a:r>
-          </a:p>
-        </p:txBody>
-      </p:sp>
-      <p:sp>
-        <p:nvSpPr>
-          <p:cNvPr id="47" name="TextBox 46"/>
-          <p:cNvSpPr txBox="1"/>
-          <p:nvPr/>
-        </p:nvSpPr>
-        <p:spPr>
-          <a:xfrm>
-            <a:off x="8046720" y="5257800"/>
-            <a:ext cx="3657600" cy="640080"/>
-          </a:xfrm>
-          <a:prstGeom prst="rect">
-            <a:avLst/>
-          </a:prstGeom>
-          <a:noFill/>
-        </p:spPr>
-        <p:txBody>
-          <a:bodyPr wrap="square">
-            <a:spAutoFit/>
-          </a:bodyPr>
-          <a:lstStyle/>
-          <a:p>
-            <a:pPr algn="ctr">
-              <a:defRPr sz="1400" b="1">
-                <a:solidFill>
-                  <a:srgbClr val="FF9933"/>
-                </a:solidFill>
-                <a:latin typeface="Calibri"/>
-              </a:defRPr>
-            </a:pPr>
-            <a:r>
-              <a:t>3 Knowledge Bases</a:t>
-            </a:r>
-            <a:br/>
-            <a:r>
-              <a:t>18 Documents Indexed</a:t>
-            </a:r>
-          </a:p>
-        </p:txBody>
-      </p:sp>
-      <p:sp>
-        <p:nvSpPr>
-          <p:cNvPr id="48" name="Rectangle 47"/>
-          <p:cNvSpPr/>
-          <p:nvPr/>
-        </p:nvSpPr>
-        <p:spPr>
-          <a:xfrm>
-            <a:off x="0" y="6309360"/>
-            <a:ext cx="12191695" cy="548640"/>
-          </a:xfrm>
-          <a:prstGeom prst="rect">
-            <a:avLst/>
-          </a:prstGeom>
-          <a:solidFill>
-            <a:srgbClr val="14243B"/>
-          </a:solidFill>
-          <a:ln>
-            <a:noFill/>
-          </a:ln>
-        </p:spPr>
-        <p:style>
-          <a:lnRef idx="1">
-            <a:schemeClr val="accent1"/>
-          </a:lnRef>
-          <a:fillRef idx="3">
-            <a:schemeClr val="accent1"/>
-          </a:fillRef>
-          <a:effectRef idx="2">
-            <a:schemeClr val="accent1"/>
-          </a:effectRef>
-          <a:fontRef idx="minor">
-            <a:schemeClr val="lt1"/>
-          </a:fontRef>
-        </p:style>
-        <p:txBody>
-          <a:bodyPr rtlCol="0" anchor="ctr"/>
-          <a:lstStyle/>
-          <a:p>
-            <a:pPr algn="ctr"/>
-          </a:p>
-        </p:txBody>
-      </p:sp>
-      <p:sp>
-        <p:nvSpPr>
-          <p:cNvPr id="49" name="TextBox 48"/>
-          <p:cNvSpPr txBox="1"/>
-          <p:nvPr/>
-        </p:nvSpPr>
-        <p:spPr>
-          <a:xfrm>
-            <a:off x="457200" y="6355080"/>
-            <a:ext cx="10972800" cy="365760"/>
-          </a:xfrm>
-          <a:prstGeom prst="rect">
-            <a:avLst/>
-          </a:prstGeom>
-          <a:noFill/>
-        </p:spPr>
-        <p:txBody>
-          <a:bodyPr wrap="square">
-            <a:spAutoFit/>
-          </a:bodyPr>
-          <a:lstStyle/>
-          <a:p>
             <a:pPr algn="ctr">
               <a:defRPr sz="1100" b="0">
                 <a:solidFill>
@@ -5687,7 +5049,7 @@
               </a:defRPr>
             </a:pPr>
             <a:r>
-              <a:t>AI for Bharat Hackathon 2026  |  Powered by AWS  |  Track 03</a:t>
+              <a:t>Powered by AWS  |  AI for Bharat Hackathon 2026  |  Track 03</a:t>
             </a:r>
           </a:p>
         </p:txBody>
@@ -5792,7 +5154,7 @@
               </a:defRPr>
             </a:pPr>
             <a:r>
-              <a:t>Additional Details / Future Development</a:t>
+              <a:t>Future Development</a:t>
             </a:r>
           </a:p>
         </p:txBody>
@@ -5912,7 +5274,7 @@
               </a:defRPr>
             </a:pPr>
             <a:r>
-              <a:t>  Multilingual voice input via Amazon Transcribe — NGO founders</a:t>
+              <a:t>  Multilingual voice input via Amazon Transcribe</a:t>
             </a:r>
           </a:p>
           <a:p>
@@ -5928,7 +5290,7 @@
               </a:defRPr>
             </a:pPr>
             <a:r>
-              <a:t>    narrate in Hindi, AI converts to English corporate proposals</a:t>
+              <a:t>  — NGO founders narrate in Hindi, AI converts</a:t>
             </a:r>
           </a:p>
           <a:p>
@@ -5944,7 +5306,7 @@
               </a:defRPr>
             </a:pPr>
             <a:r>
-              <a:t>  </a:t>
+              <a:t>  to formal English proposals</a:t>
             </a:r>
           </a:p>
           <a:p>
@@ -5960,7 +5322,7 @@
               </a:defRPr>
             </a:pPr>
             <a:r>
-              <a:t>  Expand Grant KB from 5 corporations to 50+ (Tata, Infosys,</a:t>
+              <a:t>  </a:t>
             </a:r>
           </a:p>
           <a:p>
@@ -5976,7 +5338,7 @@
               </a:defRPr>
             </a:pPr>
             <a:r>
-              <a:t>    HDFC, Reliance, Wipro, Mahindra, Adani, etc.)</a:t>
+              <a:t>  Expand Grant Knowledge Base from 5 to 50+</a:t>
             </a:r>
           </a:p>
           <a:p>
@@ -5992,7 +5354,7 @@
               </a:defRPr>
             </a:pPr>
             <a:r>
-              <a:t>  </a:t>
+              <a:t>  corporate CSR programs</a:t>
             </a:r>
           </a:p>
           <a:p>
@@ -6008,7 +5370,7 @@
               </a:defRPr>
             </a:pPr>
             <a:r>
-              <a:t>  Direct submission to corporate CSR portals (API integration)</a:t>
+              <a:t>  </a:t>
             </a:r>
           </a:p>
           <a:p>
@@ -6024,7 +5386,7 @@
               </a:defRPr>
             </a:pPr>
             <a:r>
-              <a:t>  </a:t>
+              <a:t>  Automated 12A/80G renewal reminders</a:t>
             </a:r>
           </a:p>
           <a:p>
@@ -6040,7 +5402,7 @@
               </a:defRPr>
             </a:pPr>
             <a:r>
-              <a:t>  Automated compliance reminders (12A/80G renewal alerts)</a:t>
+              <a:t>  </a:t>
             </a:r>
           </a:p>
           <a:p>
@@ -6056,22 +5418,6 @@
               </a:defRPr>
             </a:pPr>
             <a:r>
-              <a:t>  </a:t>
-            </a:r>
-          </a:p>
-          <a:p>
-            <a:pPr>
-              <a:spcAft>
-                <a:spcPts val="400"/>
-              </a:spcAft>
-              <a:defRPr sz="1100">
-                <a:solidFill>
-                  <a:srgbClr val="FFFFFF"/>
-                </a:solidFill>
-                <a:latin typeface="Calibri"/>
-              </a:defRPr>
-            </a:pPr>
-            <a:r>
               <a:t>  Mobile-first PWA for low-bandwidth rural areas</a:t>
             </a:r>
           </a:p>
@@ -6086,7 +5432,7 @@
         <p:spPr>
           <a:xfrm>
             <a:off x="6400800" y="1188720"/>
-            <a:ext cx="5303520" cy="4846320"/>
+            <a:ext cx="5303520" cy="2743200"/>
           </a:xfrm>
           <a:prstGeom prst="roundRect">
             <a:avLst/>
@@ -6167,7 +5513,7 @@
         <p:spPr>
           <a:xfrm>
             <a:off x="6583680" y="1828800"/>
-            <a:ext cx="4846320" cy="2286000"/>
+            <a:ext cx="4846320" cy="1828800"/>
           </a:xfrm>
           <a:prstGeom prst="rect">
             <a:avLst/>
@@ -6192,7 +5538,7 @@
               </a:defRPr>
             </a:pPr>
             <a:r>
-              <a:t>  NidhiAI becomes the default operating system for</a:t>
+              <a:t>  Direct submission to corporate CSR portals</a:t>
             </a:r>
           </a:p>
           <a:p>
@@ -6208,7 +5554,7 @@
               </a:defRPr>
             </a:pPr>
             <a:r>
-              <a:t>    NGO administration in India</a:t>
+              <a:t>  </a:t>
             </a:r>
           </a:p>
           <a:p>
@@ -6224,7 +5570,7 @@
               </a:defRPr>
             </a:pPr>
             <a:r>
-              <a:t>  </a:t>
+              <a:t>  Government scheme matching (PM-KISAN, MGNREGA)</a:t>
             </a:r>
           </a:p>
           <a:p>
@@ -6240,7 +5586,7 @@
               </a:defRPr>
             </a:pPr>
             <a:r>
-              <a:t>  Government scheme matching (PM-KISAN, MGNREGA)</a:t>
+              <a:t>  </a:t>
             </a:r>
           </a:p>
           <a:p>
@@ -6256,7 +5602,7 @@
               </a:defRPr>
             </a:pPr>
             <a:r>
-              <a:t>  </a:t>
+              <a:t>  WhatsApp bot for zero-tech-literacy users</a:t>
             </a:r>
           </a:p>
           <a:p>
@@ -6272,7 +5618,7 @@
               </a:defRPr>
             </a:pPr>
             <a:r>
-              <a:t>  Amazon Q Business integration for internal CSR portals</a:t>
+              <a:t>  </a:t>
             </a:r>
           </a:p>
           <a:p>
@@ -6288,7 +5634,7 @@
               </a:defRPr>
             </a:pPr>
             <a:r>
-              <a:t>  </a:t>
+              <a:t>  NidhiAI as the default admin platform for</a:t>
             </a:r>
           </a:p>
           <a:p>
@@ -6304,7 +5650,7 @@
               </a:defRPr>
             </a:pPr>
             <a:r>
-              <a:t>  WhatsApp bot for zero-tech-literacy users</a:t>
+              <a:t>  NGOs in India — compliance, funding, reporting</a:t>
             </a:r>
           </a:p>
         </p:txBody>
@@ -6385,20 +5731,20 @@
               </a:defRPr>
             </a:pPr>
             <a:r>
-              <a:t>If just 10% of Rs.38,000 Cr CSR pool reaches</a:t>
+              <a:t>If even 1% of the Rs.17,742 Cr CSR pool</a:t>
             </a:r>
             <a:br/>
             <a:r>
-              <a:t>smaller NGOs through NidhiAI:</a:t>
+              <a:t>reaches underserved NGOs through NidhiAI:</a:t>
             </a:r>
             <a:br/>
             <a:br/>
             <a:r>
-              <a:t>Rs.3,800 Crores unlocked for communities</a:t>
+              <a:t>Rs.177 Crores redirected to communities</a:t>
             </a:r>
             <a:br/>
             <a:r>
-              <a:t>that need it most.</a:t>
+              <a:t>that actually need it.</a:t>
             </a:r>
           </a:p>
         </p:txBody>
@@ -6477,7 +5823,7 @@
               </a:defRPr>
             </a:pPr>
             <a:r>
-              <a:t>AI for Bharat Hackathon 2026  |  Powered by AWS  |  Track 03</a:t>
+              <a:t>Powered by AWS  |  AI for Bharat Hackathon 2026  |  Track 03</a:t>
             </a:r>
           </a:p>
         </p:txBody>
@@ -6816,7 +6162,7 @@
               </a:defRPr>
             </a:pPr>
             <a:r>
-              <a:t>[Insert YouTube / Google Drive Link Here]</a:t>
+              <a:t>[Insert YouTube / Drive Link]</a:t>
             </a:r>
           </a:p>
         </p:txBody>
@@ -6933,7 +6279,7 @@
               </a:defRPr>
             </a:pPr>
             <a:r>
-              <a:t>[Insert Vercel Deployment URL Here]</a:t>
+              <a:t>[Insert Vercel URL]</a:t>
             </a:r>
           </a:p>
         </p:txBody>
@@ -7012,7 +6358,7 @@
               </a:defRPr>
             </a:pPr>
             <a:r>
-              <a:t>AI for Bharat Hackathon 2026  |  Powered by AWS  |  Track 03</a:t>
+              <a:t>Powered by AWS  |  AI for Bharat Hackathon 2026  |  Track 03</a:t>
             </a:r>
           </a:p>
         </p:txBody>
@@ -7074,7 +6420,7 @@
               </a:defRPr>
             </a:pPr>
             <a:r>
-              <a:t>NidhiAI (निधिAI)</a:t>
+              <a:t>NidhiAI</a:t>
             </a:r>
           </a:p>
         </p:txBody>
@@ -7189,7 +6535,7 @@
               </a:defRPr>
             </a:pPr>
             <a:r>
-              <a:t>Team: NidhiAI  |  Leader: Siddhant</a:t>
+              <a:t>Team NidhiAI  |  Leader: Siddhant</a:t>
             </a:r>
           </a:p>
         </p:txBody>
@@ -7261,7 +6607,7 @@
               </a:defRPr>
             </a:pPr>
             <a:r>
-              <a:t>Powered by AWS Bedrock  •  Amazon Textract  •  Amazon OpenSearch</a:t>
+              <a:t>Amazon Bedrock  •  Amazon Textract  •  Amazon OpenSearch</a:t>
             </a:r>
           </a:p>
         </p:txBody>
@@ -7512,7 +6858,7 @@
               <a:spcAft>
                 <a:spcPts val="400"/>
               </a:spcAft>
-              <a:defRPr sz="1300">
+              <a:defRPr sz="1200">
                 <a:solidFill>
                   <a:srgbClr val="FFFFFF"/>
                 </a:solidFill>
@@ -7520,7 +6866,7 @@
               </a:defRPr>
             </a:pPr>
             <a:r>
-              <a:t>  India's CSR mandate (Section 135): Rs.38,000 Cr/year projected</a:t>
+              <a:t>  Section 135 of the Companies Act (2013) mandates qualifying</a:t>
             </a:r>
           </a:p>
           <a:p>
@@ -7528,7 +6874,7 @@
               <a:spcAft>
                 <a:spcPts val="400"/>
               </a:spcAft>
-              <a:defRPr sz="1300">
+              <a:defRPr sz="1200">
                 <a:solidFill>
                   <a:srgbClr val="FFFFFF"/>
                 </a:solidFill>
@@ -7536,7 +6882,7 @@
               </a:defRPr>
             </a:pPr>
             <a:r>
-              <a:t>  90% of these funds flow to the top 50 well-resourced NGOs</a:t>
+              <a:t>  companies to spend 2% of avg net profits on CSR activities.</a:t>
             </a:r>
           </a:p>
           <a:p>
@@ -7544,7 +6890,7 @@
               <a:spcAft>
                 <a:spcPts val="400"/>
               </a:spcAft>
-              <a:defRPr sz="1300">
+              <a:defRPr sz="1200">
                 <a:solidFill>
                   <a:srgbClr val="FFFFFF"/>
                 </a:solidFill>
@@ -7552,7 +6898,7 @@
               </a:defRPr>
             </a:pPr>
             <a:r>
-              <a:t>  3 Million+ civil society orgs are locked out of this capital</a:t>
+              <a:t>  </a:t>
             </a:r>
           </a:p>
           <a:p>
@@ -7560,7 +6906,7 @@
               <a:spcAft>
                 <a:spcPts val="400"/>
               </a:spcAft>
-              <a:defRPr sz="1300">
+              <a:defRPr sz="1200">
                 <a:solidFill>
                   <a:srgbClr val="FFFFFF"/>
                 </a:solidFill>
@@ -7568,7 +6914,7 @@
               </a:defRPr>
             </a:pPr>
             <a:r>
-              <a:t>  Triple Barrier: Compliance paperwork + English fluency + Discovery</a:t>
+              <a:t>  In FY 2024-25, 301 major companies spent Rs.17,742 Cr on CSR</a:t>
             </a:r>
           </a:p>
           <a:p>
@@ -7576,7 +6922,7 @@
               <a:spcAft>
                 <a:spcPts val="400"/>
               </a:spcAft>
-              <a:defRPr sz="1300">
+              <a:defRPr sz="1200">
                 <a:solidFill>
                   <a:srgbClr val="FFFFFF"/>
                 </a:solidFill>
@@ -7584,74 +6930,15 @@
               </a:defRPr>
             </a:pPr>
             <a:r>
-              <a:t>  A village schoolteacher feeding 200 children can't navigate this</a:t>
-            </a:r>
-          </a:p>
-        </p:txBody>
-      </p:sp>
-      <p:sp>
-        <p:nvSpPr>
-          <p:cNvPr id="6" name="TextBox 5"/>
-          <p:cNvSpPr txBox="1"/>
-          <p:nvPr/>
-        </p:nvSpPr>
-        <p:spPr>
-          <a:xfrm>
-            <a:off x="6400800" y="1097280"/>
-            <a:ext cx="5486400" cy="457200"/>
-          </a:xfrm>
-          <a:prstGeom prst="rect">
-            <a:avLst/>
-          </a:prstGeom>
-          <a:noFill/>
-        </p:spPr>
-        <p:txBody>
-          <a:bodyPr wrap="square">
-            <a:spAutoFit/>
-          </a:bodyPr>
-          <a:lstStyle/>
-          <a:p>
-            <a:pPr algn="l">
-              <a:defRPr sz="1800" b="1">
-                <a:solidFill>
-                  <a:srgbClr val="00CC66"/>
-                </a:solidFill>
-                <a:latin typeface="Calibri"/>
-              </a:defRPr>
-            </a:pPr>
-            <a:r>
-              <a:t>THE SOLUTION</a:t>
-            </a:r>
-          </a:p>
-        </p:txBody>
-      </p:sp>
-      <p:sp>
-        <p:nvSpPr>
-          <p:cNvPr id="7" name="TextBox 6"/>
-          <p:cNvSpPr txBox="1"/>
-          <p:nvPr/>
-        </p:nvSpPr>
-        <p:spPr>
-          <a:xfrm>
-            <a:off x="6400800" y="1645920"/>
-            <a:ext cx="5303520" cy="2926080"/>
-          </a:xfrm>
-          <a:prstGeom prst="rect">
-            <a:avLst/>
-          </a:prstGeom>
-          <a:noFill/>
-        </p:spPr>
-        <p:txBody>
-          <a:bodyPr wrap="square">
-            <a:spAutoFit/>
-          </a:bodyPr>
-          <a:lstStyle/>
+              <a:t>  (CSRBOX ICOR 2025 Report). Total CSR pool: ~Rs.38,000 Cr.</a:t>
+            </a:r>
+          </a:p>
           <a:p>
             <a:pPr>
               <a:spcAft>
                 <a:spcPts val="400"/>
               </a:spcAft>
-              <a:defRPr sz="1300">
+              <a:defRPr sz="1200">
                 <a:solidFill>
                   <a:srgbClr val="FFFFFF"/>
                 </a:solidFill>
@@ -7659,7 +6946,7 @@
               </a:defRPr>
             </a:pPr>
             <a:r>
-              <a:t>  NidhiAI = AI-powered Fundraising Officer for small NGOs</a:t>
+              <a:t>  </a:t>
             </a:r>
           </a:p>
           <a:p>
@@ -7667,7 +6954,7 @@
               <a:spcAft>
                 <a:spcPts val="400"/>
               </a:spcAft>
-              <a:defRPr sz="1300">
+              <a:defRPr sz="1200">
                 <a:solidFill>
                   <a:srgbClr val="FFFFFF"/>
                 </a:solidFill>
@@ -7675,7 +6962,7 @@
               </a:defRPr>
             </a:pPr>
             <a:r>
-              <a:t>  Upload docs &gt; Compliance check &gt; Grant matching &gt; Proposal draft</a:t>
+              <a:t>  But the vast majority of these funds go to established,</a:t>
             </a:r>
           </a:p>
           <a:p>
@@ -7683,7 +6970,7 @@
               <a:spcAft>
                 <a:spcPts val="400"/>
               </a:spcAft>
-              <a:defRPr sz="1300">
+              <a:defRPr sz="1200">
                 <a:solidFill>
                   <a:srgbClr val="FFFFFF"/>
                 </a:solidFill>
@@ -7691,7 +6978,7 @@
               </a:defRPr>
             </a:pPr>
             <a:r>
-              <a:t>  Uses Amazon Bedrock Multi-Agent Supervisor Pattern</a:t>
+              <a:t>  well-connected NGOs with dedicated compliance teams.</a:t>
             </a:r>
           </a:p>
           <a:p>
@@ -7699,7 +6986,7 @@
               <a:spcAft>
                 <a:spcPts val="400"/>
               </a:spcAft>
-              <a:defRPr sz="1300">
+              <a:defRPr sz="1200">
                 <a:solidFill>
                   <a:srgbClr val="FFFFFF"/>
                 </a:solidFill>
@@ -7707,7 +6994,7 @@
               </a:defRPr>
             </a:pPr>
             <a:r>
-              <a:t>  4 specialized agents orchestrated automatically as a team</a:t>
+              <a:t>  </a:t>
             </a:r>
           </a:p>
           <a:p>
@@ -7715,7 +7002,7 @@
               <a:spcAft>
                 <a:spcPts val="400"/>
               </a:spcAft>
-              <a:defRPr sz="1300">
+              <a:defRPr sz="1200">
                 <a:solidFill>
                   <a:srgbClr val="FFFFFF"/>
                 </a:solidFill>
@@ -7723,7 +7010,274 @@
               </a:defRPr>
             </a:pPr>
             <a:r>
-              <a:t>  30-day manual process compressed into a 10-minute automated one</a:t>
+              <a:t>  3.7 million+ NGOs are registered on the DARPAN portal.</a:t>
+            </a:r>
+          </a:p>
+          <a:p>
+            <a:pPr>
+              <a:spcAft>
+                <a:spcPts val="400"/>
+              </a:spcAft>
+              <a:defRPr sz="1200">
+                <a:solidFill>
+                  <a:srgbClr val="FFFFFF"/>
+                </a:solidFill>
+                <a:latin typeface="Calibri"/>
+              </a:defRPr>
+            </a:pPr>
+            <a:r>
+              <a:t>  Most lack the resources for compliance paperwork (12A, 80G)</a:t>
+            </a:r>
+          </a:p>
+          <a:p>
+            <a:pPr>
+              <a:spcAft>
+                <a:spcPts val="400"/>
+              </a:spcAft>
+              <a:defRPr sz="1200">
+                <a:solidFill>
+                  <a:srgbClr val="FFFFFF"/>
+                </a:solidFill>
+                <a:latin typeface="Calibri"/>
+              </a:defRPr>
+            </a:pPr>
+            <a:r>
+              <a:t>  and cannot write formal English grant proposals.</a:t>
+            </a:r>
+          </a:p>
+        </p:txBody>
+      </p:sp>
+      <p:sp>
+        <p:nvSpPr>
+          <p:cNvPr id="6" name="TextBox 5"/>
+          <p:cNvSpPr txBox="1"/>
+          <p:nvPr/>
+        </p:nvSpPr>
+        <p:spPr>
+          <a:xfrm>
+            <a:off x="6400800" y="1097280"/>
+            <a:ext cx="5486400" cy="457200"/>
+          </a:xfrm>
+          <a:prstGeom prst="rect">
+            <a:avLst/>
+          </a:prstGeom>
+          <a:noFill/>
+        </p:spPr>
+        <p:txBody>
+          <a:bodyPr wrap="square">
+            <a:spAutoFit/>
+          </a:bodyPr>
+          <a:lstStyle/>
+          <a:p>
+            <a:pPr algn="l">
+              <a:defRPr sz="1800" b="1">
+                <a:solidFill>
+                  <a:srgbClr val="00CC66"/>
+                </a:solidFill>
+                <a:latin typeface="Calibri"/>
+              </a:defRPr>
+            </a:pPr>
+            <a:r>
+              <a:t>THE SOLUTION</a:t>
+            </a:r>
+          </a:p>
+        </p:txBody>
+      </p:sp>
+      <p:sp>
+        <p:nvSpPr>
+          <p:cNvPr id="7" name="TextBox 6"/>
+          <p:cNvSpPr txBox="1"/>
+          <p:nvPr/>
+        </p:nvSpPr>
+        <p:spPr>
+          <a:xfrm>
+            <a:off x="6400800" y="1645920"/>
+            <a:ext cx="5303520" cy="2926080"/>
+          </a:xfrm>
+          <a:prstGeom prst="rect">
+            <a:avLst/>
+          </a:prstGeom>
+          <a:noFill/>
+        </p:spPr>
+        <p:txBody>
+          <a:bodyPr wrap="square">
+            <a:spAutoFit/>
+          </a:bodyPr>
+          <a:lstStyle/>
+          <a:p>
+            <a:pPr>
+              <a:spcAft>
+                <a:spcPts val="400"/>
+              </a:spcAft>
+              <a:defRPr sz="1200">
+                <a:solidFill>
+                  <a:srgbClr val="FFFFFF"/>
+                </a:solidFill>
+                <a:latin typeface="Calibri"/>
+              </a:defRPr>
+            </a:pPr>
+            <a:r>
+              <a:t>  NidhiAI automates the full CSR funding lifecycle for NGOs:</a:t>
+            </a:r>
+          </a:p>
+          <a:p>
+            <a:pPr>
+              <a:spcAft>
+                <a:spcPts val="400"/>
+              </a:spcAft>
+              <a:defRPr sz="1200">
+                <a:solidFill>
+                  <a:srgbClr val="FFFFFF"/>
+                </a:solidFill>
+                <a:latin typeface="Calibri"/>
+              </a:defRPr>
+            </a:pPr>
+            <a:r>
+              <a:t>  </a:t>
+            </a:r>
+          </a:p>
+          <a:p>
+            <a:pPr>
+              <a:spcAft>
+                <a:spcPts val="400"/>
+              </a:spcAft>
+              <a:defRPr sz="1200">
+                <a:solidFill>
+                  <a:srgbClr val="FFFFFF"/>
+                </a:solidFill>
+                <a:latin typeface="Calibri"/>
+              </a:defRPr>
+            </a:pPr>
+            <a:r>
+              <a:t>  1. Upload documents — AI validates legal compliance</a:t>
+            </a:r>
+          </a:p>
+          <a:p>
+            <a:pPr>
+              <a:spcAft>
+                <a:spcPts val="400"/>
+              </a:spcAft>
+              <a:defRPr sz="1200">
+                <a:solidFill>
+                  <a:srgbClr val="FFFFFF"/>
+                </a:solidFill>
+                <a:latin typeface="Calibri"/>
+              </a:defRPr>
+            </a:pPr>
+            <a:r>
+              <a:t>  2. Discover grants — AI matches NGO to corporate CSR funds</a:t>
+            </a:r>
+          </a:p>
+          <a:p>
+            <a:pPr>
+              <a:spcAft>
+                <a:spcPts val="400"/>
+              </a:spcAft>
+              <a:defRPr sz="1200">
+                <a:solidFill>
+                  <a:srgbClr val="FFFFFF"/>
+                </a:solidFill>
+                <a:latin typeface="Calibri"/>
+              </a:defRPr>
+            </a:pPr>
+            <a:r>
+              <a:t>  3. Draft proposals — AI writes formal grant applications</a:t>
+            </a:r>
+          </a:p>
+          <a:p>
+            <a:pPr>
+              <a:spcAft>
+                <a:spcPts val="400"/>
+              </a:spcAft>
+              <a:defRPr sz="1200">
+                <a:solidFill>
+                  <a:srgbClr val="FFFFFF"/>
+                </a:solidFill>
+                <a:latin typeface="Calibri"/>
+              </a:defRPr>
+            </a:pPr>
+            <a:r>
+              <a:t>  4. Ask questions — chatbot answers CSR regulatory queries</a:t>
+            </a:r>
+          </a:p>
+          <a:p>
+            <a:pPr>
+              <a:spcAft>
+                <a:spcPts val="400"/>
+              </a:spcAft>
+              <a:defRPr sz="1200">
+                <a:solidFill>
+                  <a:srgbClr val="FFFFFF"/>
+                </a:solidFill>
+                <a:latin typeface="Calibri"/>
+              </a:defRPr>
+            </a:pPr>
+            <a:r>
+              <a:t>  </a:t>
+            </a:r>
+          </a:p>
+          <a:p>
+            <a:pPr>
+              <a:spcAft>
+                <a:spcPts val="400"/>
+              </a:spcAft>
+              <a:defRPr sz="1200">
+                <a:solidFill>
+                  <a:srgbClr val="FFFFFF"/>
+                </a:solidFill>
+                <a:latin typeface="Calibri"/>
+              </a:defRPr>
+            </a:pPr>
+            <a:r>
+              <a:t>  Built on Amazon Bedrock Agents using the Supervisor Pattern.</a:t>
+            </a:r>
+          </a:p>
+          <a:p>
+            <a:pPr>
+              <a:spcAft>
+                <a:spcPts val="400"/>
+              </a:spcAft>
+              <a:defRPr sz="1200">
+                <a:solidFill>
+                  <a:srgbClr val="FFFFFF"/>
+                </a:solidFill>
+                <a:latin typeface="Calibri"/>
+              </a:defRPr>
+            </a:pPr>
+            <a:r>
+              <a:t>  4 specialized AI agents orchestrated as a coordinated team.</a:t>
+            </a:r>
+          </a:p>
+          <a:p>
+            <a:pPr>
+              <a:spcAft>
+                <a:spcPts val="400"/>
+              </a:spcAft>
+              <a:defRPr sz="1200">
+                <a:solidFill>
+                  <a:srgbClr val="FFFFFF"/>
+                </a:solidFill>
+                <a:latin typeface="Calibri"/>
+              </a:defRPr>
+            </a:pPr>
+            <a:r>
+              <a:t>  </a:t>
+            </a:r>
+          </a:p>
+          <a:p>
+            <a:pPr>
+              <a:spcAft>
+                <a:spcPts val="400"/>
+              </a:spcAft>
+              <a:defRPr sz="1200">
+                <a:solidFill>
+                  <a:srgbClr val="FFFFFF"/>
+                </a:solidFill>
+                <a:latin typeface="Calibri"/>
+              </a:defRPr>
+            </a:pPr>
+            <a:r>
+              <a:t>  What takes 30 days manually now takes 10 minutes.</a:t>
             </a:r>
           </a:p>
         </p:txBody>
@@ -7779,7 +7333,7 @@
         </p:nvSpPr>
         <p:spPr>
           <a:xfrm>
-            <a:off x="731520" y="5166360"/>
+            <a:off x="731520" y="5120640"/>
             <a:ext cx="3200400" cy="822960"/>
           </a:xfrm>
           <a:prstGeom prst="rect">
@@ -7794,7 +7348,7 @@
           <a:lstStyle/>
           <a:p>
             <a:pPr algn="ctr">
-              <a:defRPr sz="2000" b="1">
+              <a:defRPr sz="1800" b="1">
                 <a:solidFill>
                   <a:srgbClr val="FF9933"/>
                 </a:solidFill>
@@ -7802,11 +7356,11 @@
               </a:defRPr>
             </a:pPr>
             <a:r>
-              <a:t>38,000 Cr</a:t>
+              <a:t>Rs.17,742 Cr</a:t>
             </a:r>
             <a:br/>
             <a:r>
-              <a:t>CSR Market</a:t>
+              <a:t>CSR Spend FY24-25</a:t>
             </a:r>
           </a:p>
         </p:txBody>
@@ -7819,7 +7373,7 @@
         </p:nvSpPr>
         <p:spPr>
           <a:xfrm>
-            <a:off x="4114800" y="5166360"/>
+            <a:off x="4114800" y="5120640"/>
             <a:ext cx="3200400" cy="822960"/>
           </a:xfrm>
           <a:prstGeom prst="rect">
@@ -7834,7 +7388,7 @@
           <a:lstStyle/>
           <a:p>
             <a:pPr algn="ctr">
-              <a:defRPr sz="2000" b="1">
+              <a:defRPr sz="1800" b="1">
                 <a:solidFill>
                   <a:srgbClr val="FF9933"/>
                 </a:solidFill>
@@ -7842,7 +7396,7 @@
               </a:defRPr>
             </a:pPr>
             <a:r>
-              <a:t>3 Million+</a:t>
+              <a:t>3.7 Million+</a:t>
             </a:r>
             <a:br/>
             <a:r>
@@ -7859,7 +7413,7 @@
         </p:nvSpPr>
         <p:spPr>
           <a:xfrm>
-            <a:off x="7772400" y="5166360"/>
+            <a:off x="7772400" y="5120640"/>
             <a:ext cx="3657600" cy="822960"/>
           </a:xfrm>
           <a:prstGeom prst="rect">
@@ -7874,26 +7428,62 @@
           <a:lstStyle/>
           <a:p>
             <a:pPr algn="ctr">
-              <a:defRPr sz="2000" b="1">
-                <a:solidFill>
-                  <a:srgbClr val="FF4444"/>
-                </a:solidFill>
-                <a:latin typeface="Calibri"/>
-              </a:defRPr>
-            </a:pPr>
-            <a:r>
-              <a:t>90% Funds</a:t>
+              <a:defRPr sz="1800" b="1">
+                <a:solidFill>
+                  <a:srgbClr val="00D4AA"/>
+                </a:solidFill>
+                <a:latin typeface="Calibri"/>
+              </a:defRPr>
+            </a:pPr>
+            <a:r>
+              <a:t>Schedule VII</a:t>
             </a:r>
             <a:br/>
             <a:r>
-              <a:t>Misallocated</a:t>
-            </a:r>
-          </a:p>
-        </p:txBody>
-      </p:sp>
-      <p:sp>
-        <p:nvSpPr>
-          <p:cNvPr id="12" name="Rectangle 11"/>
+              <a:t>7 CSR Categories</a:t>
+            </a:r>
+          </a:p>
+        </p:txBody>
+      </p:sp>
+      <p:sp>
+        <p:nvSpPr>
+          <p:cNvPr id="12" name="TextBox 11"/>
+          <p:cNvSpPr txBox="1"/>
+          <p:nvPr/>
+        </p:nvSpPr>
+        <p:spPr>
+          <a:xfrm>
+            <a:off x="457200" y="6144768"/>
+            <a:ext cx="11277295" cy="182880"/>
+          </a:xfrm>
+          <a:prstGeom prst="rect">
+            <a:avLst/>
+          </a:prstGeom>
+          <a:noFill/>
+        </p:spPr>
+        <p:txBody>
+          <a:bodyPr wrap="square">
+            <a:spAutoFit/>
+          </a:bodyPr>
+          <a:lstStyle/>
+          <a:p>
+            <a:pPr algn="ctr">
+              <a:defRPr sz="900" b="0">
+                <a:solidFill>
+                  <a:srgbClr val="8899AA"/>
+                </a:solidFill>
+                <a:latin typeface="Calibri"/>
+              </a:defRPr>
+            </a:pPr>
+            <a:r>
+              <a:t>Sources: CSRBOX ICOR 2025 Report  |  DARPAN Portal  |  Companies Act Section 135</a:t>
+            </a:r>
+          </a:p>
+        </p:txBody>
+      </p:sp>
+      <p:sp>
+        <p:nvSpPr>
+          <p:cNvPr id="13" name="Rectangle 12"/>
           <p:cNvSpPr/>
           <p:nvPr/>
         </p:nvSpPr>
@@ -7936,7 +7526,7 @@
       </p:sp>
       <p:sp>
         <p:nvSpPr>
-          <p:cNvPr id="13" name="TextBox 12"/>
+          <p:cNvPr id="14" name="TextBox 13"/>
           <p:cNvSpPr txBox="1"/>
           <p:nvPr/>
         </p:nvSpPr>
@@ -7965,7 +7555,7 @@
               </a:defRPr>
             </a:pPr>
             <a:r>
-              <a:t>AI for Bharat Hackathon 2026  |  Powered by AWS  |  Track 03</a:t>
+              <a:t>Powered by AWS  |  AI for Bharat Hackathon 2026  |  Track 03</a:t>
             </a:r>
           </a:p>
         </p:txBody>
@@ -8070,7 +7660,7 @@
               </a:defRPr>
             </a:pPr>
             <a:r>
-              <a:t>Why AI is Required + AWS Services in Architecture</a:t>
+              <a:t>Why AI + How AWS Services Are Used</a:t>
             </a:r>
           </a:p>
         </p:txBody>
@@ -8191,58 +7781,49 @@
               </a:defRPr>
             </a:pPr>
             <a:r>
-              <a:t>This isn't a CRUD app.</a:t>
+              <a:t>Legal certificates (12A, 80G) are</a:t>
+            </a:r>
+            <a:br/>
+            <a:r>
+              <a:t>scanned PDFs with no standard API.</a:t>
+            </a:r>
+            <a:br/>
+            <a:r>
+              <a:t>Only OCR + an AI agent can extract</a:t>
+            </a:r>
+            <a:br/>
+            <a:r>
+              <a:t>registration numbers and dates.</a:t>
             </a:r>
             <a:br/>
             <a:br/>
             <a:r>
-              <a:t>12A/80G certs are scanned</a:t>
+              <a:t>Keyword search can't map 'village</a:t>
             </a:r>
             <a:br/>
             <a:r>
-              <a:t>PDFs with no API. Only</a:t>
+              <a:t>water project' to 'Schedule VII</a:t>
             </a:r>
             <a:br/>
             <a:r>
-              <a:t>Textract + an LLM agent</a:t>
+              <a:t>Rural Infrastructure.' Semantic</a:t>
             </a:r>
             <a:br/>
             <a:r>
-              <a:t>can extract dates reliably.</a:t>
+              <a:t>vector search is required.</a:t>
             </a:r>
             <a:br/>
             <a:br/>
             <a:r>
-              <a:t>Keyword search can't map</a:t>
+              <a:t>NGOs can't afford grant writers.</a:t>
             </a:r>
             <a:br/>
             <a:r>
-              <a:t>'village water project' to</a:t>
+              <a:t>An LLM generates formal proposals</a:t>
             </a:r>
             <a:br/>
             <a:r>
-              <a:t>'Schedule VII Rural Infra'.</a:t>
-            </a:r>
-            <a:br/>
-            <a:r>
-              <a:t>Semantic embeddings are</a:t>
-            </a:r>
-            <a:br/>
-            <a:r>
-              <a:t>strictly required.</a:t>
-            </a:r>
-            <a:br/>
-            <a:br/>
-            <a:r>
-              <a:t>NGOs can't afford Rs.50K</a:t>
-            </a:r>
-            <a:br/>
-            <a:r>
-              <a:t>grant writers. Claude does</a:t>
-            </a:r>
-            <a:br/>
-            <a:r>
-              <a:t>it in 18 seconds.</a:t>
+              <a:t>that match corporate requirements.</a:t>
             </a:r>
           </a:p>
         </p:txBody>
@@ -8363,52 +7944,59 @@
               </a:defRPr>
             </a:pPr>
             <a:r>
-              <a:t>Bedrock Agents: 5 agents</a:t>
+              <a:t>Amazon Bedrock Agents:</a:t>
             </a:r>
             <a:br/>
             <a:r>
-              <a:t>(1 Supervisor + 4 sub-agents)</a:t>
+              <a:t>Supervisor Pattern orchestrating</a:t>
+            </a:r>
+            <a:br/>
+            <a:r>
+              <a:t>4 specialized sub-agents</a:t>
             </a:r>
             <a:br/>
             <a:br/>
             <a:r>
-              <a:t>Bedrock KBs: 3 knowledge</a:t>
+              <a:t>Amazon Textract:</a:t>
             </a:r>
             <a:br/>
             <a:r>
-              <a:t>bases on OpenSearch Serverless</a:t>
+              <a:t>OCR on government certificates</a:t>
             </a:r>
             <a:br/>
             <a:br/>
             <a:r>
-              <a:t>Titan Embeddings V2 for</a:t>
+              <a:t>Bedrock Knowledge Bases (x3):</a:t>
             </a:r>
             <a:br/>
             <a:r>
-              <a:t>vector search across KBs</a:t>
+              <a:t>CSR laws, corporate CSR filings,</a:t>
+            </a:r>
+            <a:br/>
+            <a:r>
+              <a:t>proposal templates — all on</a:t>
+            </a:r>
+            <a:br/>
+            <a:r>
+              <a:t>OpenSearch Serverless</a:t>
             </a:r>
             <a:br/>
             <a:br/>
             <a:r>
-              <a:t>Textract: Document OCR</a:t>
+              <a:t>AWS Lambda (x4):</a:t>
             </a:r>
             <a:br/>
             <a:r>
-              <a:t>on legal certificates</a:t>
+              <a:t>Serverless compute for each action</a:t>
             </a:r>
             <a:br/>
             <a:br/>
             <a:r>
-              <a:t>Lambda x4: Serverless</a:t>
+              <a:t>S3 + DynamoDB:</a:t>
             </a:r>
             <a:br/>
             <a:r>
-              <a:t>compute for each action</a:t>
-            </a:r>
-            <a:br/>
-            <a:br/>
-            <a:r>
-              <a:t>S3 x5 + DynamoDB x4</a:t>
+              <a:t>Document storage and state</a:t>
             </a:r>
           </a:p>
         </p:txBody>
@@ -8533,15 +8121,15 @@
             </a:r>
             <a:br/>
             <a:r>
-              <a:t>  30 days, Rs.50K per proposal</a:t>
+              <a:t>  Weeks of manual research</a:t>
             </a:r>
             <a:br/>
             <a:r>
-              <a:t>  Manual search across websites</a:t>
+              <a:t>  Rs.50,000+ per grant writer</a:t>
             </a:r>
             <a:br/>
             <a:r>
-              <a:t>  CA fee for compliance check</a:t>
+              <a:t>  CA fees for compliance</a:t>
             </a:r>
             <a:br/>
             <a:br/>
@@ -8550,24 +8138,28 @@
             </a:r>
             <a:br/>
             <a:r>
-              <a:t>  10 minutes, Rs.10 per proposal</a:t>
+              <a:t>  Grants found in seconds</a:t>
             </a:r>
             <a:br/>
             <a:r>
-              <a:t>  AI-matched across 5+ corps</a:t>
+              <a:t>  Proposals drafted in 15 seconds</a:t>
             </a:r>
             <a:br/>
             <a:r>
-              <a:t>  Instant automated validation</a:t>
+              <a:t>  Compliance checked instantly</a:t>
             </a:r>
             <a:br/>
             <a:br/>
             <a:r>
-              <a:t>5000x cost reduction.</a:t>
+              <a:t>The AI layer converts a 30-day,</a:t>
             </a:r>
             <a:br/>
             <a:r>
-              <a:t>200x faster delivery.</a:t>
+              <a:t>Rs.50,000 process into a 10-min,</a:t>
+            </a:r>
+            <a:br/>
+            <a:r>
+              <a:t>near-zero-cost automated one.</a:t>
             </a:r>
           </a:p>
         </p:txBody>
@@ -8646,7 +8238,7 @@
               </a:defRPr>
             </a:pPr>
             <a:r>
-              <a:t>AI for Bharat Hackathon 2026  |  Powered by AWS  |  Track 03</a:t>
+              <a:t>Powered by AWS  |  AI for Bharat Hackathon 2026  |  Track 03</a:t>
             </a:r>
           </a:p>
         </p:txBody>
@@ -8751,7 +8343,7 @@
               </a:defRPr>
             </a:pPr>
             <a:r>
-              <a:t>Key Features of the Prototype</a:t>
+              <a:t>Features of the Prototype</a:t>
             </a:r>
           </a:p>
         </p:txBody>
@@ -8909,15 +8501,15 @@
               </a:defRPr>
             </a:pPr>
             <a:r>
-              <a:t>Upload 12A, 80G, CSR-1 certs.</a:t>
+              <a:t>Upload 12A, 80G, CSR-1 certificates.</a:t>
             </a:r>
             <a:br/>
             <a:r>
-              <a:t>Textract scans, Bedrock validates.</a:t>
+              <a:t>Textract reads them, Bedrock validates.</a:t>
             </a:r>
             <a:br/>
             <a:r>
-              <a:t>Instant red/green status.</a:t>
+              <a:t>Instant pass/fail with expiry dates.</a:t>
             </a:r>
           </a:p>
         </p:txBody>
@@ -9075,15 +8667,15 @@
               </a:defRPr>
             </a:pPr>
             <a:r>
-              <a:t>Semantic search across 5 corporate</a:t>
+              <a:t>Semantic search across corporate CSR</a:t>
             </a:r>
             <a:br/>
             <a:r>
-              <a:t>CSR programs. Ranked matches</a:t>
+              <a:t>filings. Returns ranked matches with</a:t>
             </a:r>
             <a:br/>
             <a:r>
-              <a:t>with relevance scores (93%, 88%).</a:t>
+              <a:t>relevance scores (e.g., 93%, 88%).</a:t>
             </a:r>
           </a:p>
         </p:txBody>
@@ -9241,15 +8833,15 @@
               </a:defRPr>
             </a:pPr>
             <a:r>
-              <a:t>One-click formal 5-page proposals</a:t>
+              <a:t>One-click formal proposal drafting.</a:t>
             </a:r>
             <a:br/>
             <a:r>
-              <a:t>tailored to each grant's criteria.</a:t>
+              <a:t>Output is livestreamed to screen as</a:t>
             </a:r>
             <a:br/>
             <a:r>
-              <a:t>PDF output ready to send.</a:t>
+              <a:t>the model writes. PDF export.</a:t>
             </a:r>
           </a:p>
         </p:txBody>
@@ -9407,15 +8999,15 @@
               </a:defRPr>
             </a:pPr>
             <a:r>
-              <a:t>Auto-generates quarterly reports</a:t>
+              <a:t>Quarterly reports using user-provided</a:t>
             </a:r>
             <a:br/>
             <a:r>
-              <a:t>with AI-computed metrics from</a:t>
+              <a:t>data (beneficiaries, funds utilized).</a:t>
             </a:r>
             <a:br/>
             <a:r>
-              <a:t>platform activity data.</a:t>
+              <a:t>AI computes metrics and generates PDF.</a:t>
             </a:r>
           </a:p>
         </p:txBody>
@@ -9573,15 +9165,15 @@
               </a:defRPr>
             </a:pPr>
             <a:r>
-              <a:t>Knowledge Base of Indian CSR laws</a:t>
+              <a:t>Knowledge Base of Indian CSR laws.</a:t>
             </a:r>
             <a:br/>
             <a:r>
-              <a:t>(Section 135, Schedule VII, FCRA).</a:t>
+              <a:t>Answers questions about Section 135,</a:t>
             </a:r>
             <a:br/>
             <a:r>
-              <a:t>Answers regulatory questions.</a:t>
+              <a:t>Schedule VII, FCRA, 12A/80G.</a:t>
             </a:r>
           </a:p>
         </p:txBody>
@@ -9739,15 +9331,15 @@
               </a:defRPr>
             </a:pPr>
             <a:r>
-              <a:t>See the Supervisor's thinking live.</a:t>
+              <a:t>See the multi-agent orchestration</a:t>
             </a:r>
             <a:br/>
             <a:r>
-              <a:t>Shows which sub-agent was called,</a:t>
+              <a:t>live — which agent was called, what</a:t>
             </a:r>
             <a:br/>
             <a:r>
-              <a:t>what data was retrieved.</a:t>
+              <a:t>data was retrieved, what happened.</a:t>
             </a:r>
           </a:p>
         </p:txBody>
@@ -9826,7 +9418,7 @@
               </a:defRPr>
             </a:pPr>
             <a:r>
-              <a:t>AI for Bharat Hackathon 2026  |  Powered by AWS  |  Track 03</a:t>
+              <a:t>Powered by AWS  |  AI for Bharat Hackathon 2026  |  Track 03</a:t>
             </a:r>
           </a:p>
         </p:txBody>
@@ -9931,7 +9523,7 @@
               </a:defRPr>
             </a:pPr>
             <a:r>
-              <a:t>Process Flow: End-to-End User Journey</a:t>
+              <a:t>Process Flow</a:t>
             </a:r>
           </a:p>
         </p:txBody>
@@ -9983,7 +9575,7 @@
               </a:defRPr>
             </a:pPr>
             <a:r>
-              <a:t>👤 NGO Leader</a:t>
+              <a:t>NGO Leader</a:t>
             </a:r>
             <a:br/>
             <a:r>
@@ -10082,7 +9674,7 @@
               </a:defRPr>
             </a:pPr>
             <a:r>
-              <a:t>⚖️ Compliance</a:t>
+              <a:t>Compliance</a:t>
             </a:r>
             <a:br/>
             <a:r>
@@ -10181,11 +9773,11 @@
               </a:defRPr>
             </a:pPr>
             <a:r>
-              <a:t>🔍 Scout Agent</a:t>
+              <a:t>Grant Scout</a:t>
             </a:r>
             <a:br/>
             <a:r>
-              <a:t>Finds Grants</a:t>
+              <a:t>Finds Matches</a:t>
             </a:r>
           </a:p>
         </p:txBody>
@@ -10280,11 +9872,11 @@
               </a:defRPr>
             </a:pPr>
             <a:r>
-              <a:t>📝 Proposal Agent</a:t>
+              <a:t>Proposal Agent</a:t>
             </a:r>
             <a:br/>
             <a:r>
-              <a:t>Writes PDF</a:t>
+              <a:t>Drafts PDF</a:t>
             </a:r>
           </a:p>
         </p:txBody>
@@ -10379,7 +9971,7 @@
               </a:defRPr>
             </a:pPr>
             <a:r>
-              <a:t>📄 NGO Gets</a:t>
+              <a:t>NGO Gets</a:t>
             </a:r>
             <a:br/>
             <a:r>
@@ -10437,7 +10029,7 @@
               </a:defRPr>
             </a:pPr>
             <a:r>
-              <a:t>🤖 Orchestrated by SUPERVISOR AGENT (Bedrock Supervisor Pattern)</a:t>
+              <a:t>All orchestrated by SUPERVISOR AGENT (Bedrock Supervisor Pattern)</a:t>
             </a:r>
           </a:p>
         </p:txBody>
@@ -10450,8 +10042,8 @@
         </p:nvSpPr>
         <p:spPr>
           <a:xfrm>
-            <a:off x="457200" y="4846320"/>
-            <a:ext cx="2103120" cy="274320"/>
+            <a:off x="914400" y="4846320"/>
+            <a:ext cx="3200400" cy="274320"/>
           </a:xfrm>
           <a:prstGeom prst="rect">
             <a:avLst/>
@@ -10465,7 +10057,7 @@
           <a:lstStyle/>
           <a:p>
             <a:pPr algn="ctr">
-              <a:defRPr sz="1000" b="1">
+              <a:defRPr sz="1200" b="1">
                 <a:solidFill>
                   <a:srgbClr val="FF9933"/>
                 </a:solidFill>
@@ -10473,7 +10065,7 @@
               </a:defRPr>
             </a:pPr>
             <a:r>
-              <a:t>Compliance Agent</a:t>
+              <a:t>Step 1-2</a:t>
             </a:r>
           </a:p>
         </p:txBody>
@@ -10486,8 +10078,8 @@
         </p:nvSpPr>
         <p:spPr>
           <a:xfrm>
-            <a:off x="457200" y="5120640"/>
-            <a:ext cx="2103120" cy="274320"/>
+            <a:off x="914400" y="5166360"/>
+            <a:ext cx="3200400" cy="914400"/>
           </a:xfrm>
           <a:prstGeom prst="rect">
             <a:avLst/>
@@ -10501,15 +10093,27 @@
           <a:lstStyle/>
           <a:p>
             <a:pPr algn="ctr">
-              <a:defRPr sz="900" b="0">
-                <a:solidFill>
-                  <a:srgbClr val="8899AA"/>
-                </a:solidFill>
-                <a:latin typeface="Calibri"/>
-              </a:defRPr>
-            </a:pPr>
-            <a:r>
-              <a:t>ID: GFOH0VN84S</a:t>
+              <a:defRPr sz="1000" b="0">
+                <a:solidFill>
+                  <a:srgbClr val="CCCCCC"/>
+                </a:solidFill>
+                <a:latin typeface="Calibri"/>
+              </a:defRPr>
+            </a:pPr>
+            <a:r>
+              <a:t>Amazon Textract extracts</a:t>
+            </a:r>
+            <a:br/>
+            <a:r>
+              <a:t>fields from scanned 12A/80G</a:t>
+            </a:r>
+            <a:br/>
+            <a:r>
+              <a:t>certificates. Bedrock agent</a:t>
+            </a:r>
+            <a:br/>
+            <a:r>
+              <a:t>validates compliance.</a:t>
             </a:r>
           </a:p>
         </p:txBody>
@@ -10522,8 +10126,8 @@
         </p:nvSpPr>
         <p:spPr>
           <a:xfrm>
-            <a:off x="2788920" y="4846320"/>
-            <a:ext cx="2103120" cy="274320"/>
+            <a:off x="4572000" y="4846320"/>
+            <a:ext cx="3200400" cy="274320"/>
           </a:xfrm>
           <a:prstGeom prst="rect">
             <a:avLst/>
@@ -10537,7 +10141,7 @@
           <a:lstStyle/>
           <a:p>
             <a:pPr algn="ctr">
-              <a:defRPr sz="1000" b="1">
+              <a:defRPr sz="1200" b="1">
                 <a:solidFill>
                   <a:srgbClr val="FF9933"/>
                 </a:solidFill>
@@ -10545,7 +10149,7 @@
               </a:defRPr>
             </a:pPr>
             <a:r>
-              <a:t>Grant Scout Agent</a:t>
+              <a:t>Step 3</a:t>
             </a:r>
           </a:p>
         </p:txBody>
@@ -10558,8 +10162,8 @@
         </p:nvSpPr>
         <p:spPr>
           <a:xfrm>
-            <a:off x="2788920" y="5120640"/>
-            <a:ext cx="2103120" cy="274320"/>
+            <a:off x="4572000" y="5166360"/>
+            <a:ext cx="3200400" cy="914400"/>
           </a:xfrm>
           <a:prstGeom prst="rect">
             <a:avLst/>
@@ -10573,15 +10177,27 @@
           <a:lstStyle/>
           <a:p>
             <a:pPr algn="ctr">
-              <a:defRPr sz="900" b="0">
-                <a:solidFill>
-                  <a:srgbClr val="8899AA"/>
-                </a:solidFill>
-                <a:latin typeface="Calibri"/>
-              </a:defRPr>
-            </a:pPr>
-            <a:r>
-              <a:t>ID: KRPTCZMV4Z</a:t>
+              <a:defRPr sz="1000" b="0">
+                <a:solidFill>
+                  <a:srgbClr val="CCCCCC"/>
+                </a:solidFill>
+                <a:latin typeface="Calibri"/>
+              </a:defRPr>
+            </a:pPr>
+            <a:r>
+              <a:t>Titan Embeddings V2 queries</a:t>
+            </a:r>
+            <a:br/>
+            <a:r>
+              <a:t>OpenSearch Serverless KB.</a:t>
+            </a:r>
+            <a:br/>
+            <a:r>
+              <a:t>Returns ranked matches</a:t>
+            </a:r>
+            <a:br/>
+            <a:r>
+              <a:t>by relevance to NGO profile.</a:t>
             </a:r>
           </a:p>
         </p:txBody>
@@ -10594,8 +10210,8 @@
         </p:nvSpPr>
         <p:spPr>
           <a:xfrm>
-            <a:off x="5120640" y="4846320"/>
-            <a:ext cx="2103120" cy="274320"/>
+            <a:off x="8229600" y="4846320"/>
+            <a:ext cx="3200400" cy="274320"/>
           </a:xfrm>
           <a:prstGeom prst="rect">
             <a:avLst/>
@@ -10609,7 +10225,7 @@
           <a:lstStyle/>
           <a:p>
             <a:pPr algn="ctr">
-              <a:defRPr sz="1000" b="1">
+              <a:defRPr sz="1200" b="1">
                 <a:solidFill>
                   <a:srgbClr val="FF9933"/>
                 </a:solidFill>
@@ -10617,7 +10233,7 @@
               </a:defRPr>
             </a:pPr>
             <a:r>
-              <a:t>Proposal Agent</a:t>
+              <a:t>Step 4-5</a:t>
             </a:r>
           </a:p>
         </p:txBody>
@@ -10630,8 +10246,8 @@
         </p:nvSpPr>
         <p:spPr>
           <a:xfrm>
-            <a:off x="5120640" y="5120640"/>
-            <a:ext cx="2103120" cy="274320"/>
+            <a:off x="8229600" y="5166360"/>
+            <a:ext cx="3200400" cy="914400"/>
           </a:xfrm>
           <a:prstGeom prst="rect">
             <a:avLst/>
@@ -10645,202 +10261,34 @@
           <a:lstStyle/>
           <a:p>
             <a:pPr algn="ctr">
-              <a:defRPr sz="900" b="0">
-                <a:solidFill>
-                  <a:srgbClr val="8899AA"/>
-                </a:solidFill>
-                <a:latin typeface="Calibri"/>
-              </a:defRPr>
-            </a:pPr>
-            <a:r>
-              <a:t>ID: 23TIS55Z0P</a:t>
-            </a:r>
-          </a:p>
-        </p:txBody>
-      </p:sp>
-      <p:sp>
-        <p:nvSpPr>
-          <p:cNvPr id="20" name="TextBox 19"/>
-          <p:cNvSpPr txBox="1"/>
-          <p:nvPr/>
-        </p:nvSpPr>
-        <p:spPr>
-          <a:xfrm>
-            <a:off x="7452359" y="4846320"/>
-            <a:ext cx="2103120" cy="274320"/>
-          </a:xfrm>
-          <a:prstGeom prst="rect">
-            <a:avLst/>
-          </a:prstGeom>
-          <a:noFill/>
-        </p:spPr>
-        <p:txBody>
-          <a:bodyPr wrap="square">
-            <a:spAutoFit/>
-          </a:bodyPr>
-          <a:lstStyle/>
-          <a:p>
-            <a:pPr algn="ctr">
-              <a:defRPr sz="1000" b="1">
-                <a:solidFill>
-                  <a:srgbClr val="FF9933"/>
-                </a:solidFill>
-                <a:latin typeface="Calibri"/>
-              </a:defRPr>
-            </a:pPr>
-            <a:r>
-              <a:t>Impact Agent</a:t>
-            </a:r>
-          </a:p>
-        </p:txBody>
-      </p:sp>
-      <p:sp>
-        <p:nvSpPr>
-          <p:cNvPr id="21" name="TextBox 20"/>
-          <p:cNvSpPr txBox="1"/>
-          <p:nvPr/>
-        </p:nvSpPr>
-        <p:spPr>
-          <a:xfrm>
-            <a:off x="7452359" y="5120640"/>
-            <a:ext cx="2103120" cy="274320"/>
-          </a:xfrm>
-          <a:prstGeom prst="rect">
-            <a:avLst/>
-          </a:prstGeom>
-          <a:noFill/>
-        </p:spPr>
-        <p:txBody>
-          <a:bodyPr wrap="square">
-            <a:spAutoFit/>
-          </a:bodyPr>
-          <a:lstStyle/>
-          <a:p>
-            <a:pPr algn="ctr">
-              <a:defRPr sz="900" b="0">
-                <a:solidFill>
-                  <a:srgbClr val="8899AA"/>
-                </a:solidFill>
-                <a:latin typeface="Calibri"/>
-              </a:defRPr>
-            </a:pPr>
-            <a:r>
-              <a:t>ID: PHLYZYB11A</a:t>
-            </a:r>
-          </a:p>
-        </p:txBody>
-      </p:sp>
-      <p:sp>
-        <p:nvSpPr>
-          <p:cNvPr id="22" name="TextBox 21"/>
-          <p:cNvSpPr txBox="1"/>
-          <p:nvPr/>
-        </p:nvSpPr>
-        <p:spPr>
-          <a:xfrm>
-            <a:off x="9784080" y="4846320"/>
-            <a:ext cx="2103120" cy="274320"/>
-          </a:xfrm>
-          <a:prstGeom prst="rect">
-            <a:avLst/>
-          </a:prstGeom>
-          <a:noFill/>
-        </p:spPr>
-        <p:txBody>
-          <a:bodyPr wrap="square">
-            <a:spAutoFit/>
-          </a:bodyPr>
-          <a:lstStyle/>
-          <a:p>
-            <a:pPr algn="ctr">
-              <a:defRPr sz="1000" b="1">
-                <a:solidFill>
-                  <a:srgbClr val="FF9933"/>
-                </a:solidFill>
-                <a:latin typeface="Calibri"/>
-              </a:defRPr>
-            </a:pPr>
-            <a:r>
-              <a:t>Supervisor Agent</a:t>
-            </a:r>
-          </a:p>
-        </p:txBody>
-      </p:sp>
-      <p:sp>
-        <p:nvSpPr>
-          <p:cNvPr id="23" name="TextBox 22"/>
-          <p:cNvSpPr txBox="1"/>
-          <p:nvPr/>
-        </p:nvSpPr>
-        <p:spPr>
-          <a:xfrm>
-            <a:off x="9784080" y="5120640"/>
-            <a:ext cx="2103120" cy="274320"/>
-          </a:xfrm>
-          <a:prstGeom prst="rect">
-            <a:avLst/>
-          </a:prstGeom>
-          <a:noFill/>
-        </p:spPr>
-        <p:txBody>
-          <a:bodyPr wrap="square">
-            <a:spAutoFit/>
-          </a:bodyPr>
-          <a:lstStyle/>
-          <a:p>
-            <a:pPr algn="ctr">
-              <a:defRPr sz="900" b="0">
-                <a:solidFill>
-                  <a:srgbClr val="8899AA"/>
-                </a:solidFill>
-                <a:latin typeface="Calibri"/>
-              </a:defRPr>
-            </a:pPr>
-            <a:r>
-              <a:t>ID: HB82HPMIA3</a:t>
-            </a:r>
-          </a:p>
-        </p:txBody>
-      </p:sp>
-      <p:sp>
-        <p:nvSpPr>
-          <p:cNvPr id="24" name="TextBox 23"/>
-          <p:cNvSpPr txBox="1"/>
-          <p:nvPr/>
-        </p:nvSpPr>
-        <p:spPr>
-          <a:xfrm>
-            <a:off x="457200" y="5669280"/>
-            <a:ext cx="10972800" cy="365760"/>
-          </a:xfrm>
-          <a:prstGeom prst="rect">
-            <a:avLst/>
-          </a:prstGeom>
-          <a:noFill/>
-        </p:spPr>
-        <p:txBody>
-          <a:bodyPr wrap="square">
-            <a:spAutoFit/>
-          </a:bodyPr>
-          <a:lstStyle/>
-          <a:p>
-            <a:pPr algn="ctr">
-              <a:defRPr sz="1200" b="0">
-                <a:solidFill>
-                  <a:srgbClr val="00D4AA"/>
-                </a:solidFill>
-                <a:latin typeface="Calibri"/>
-              </a:defRPr>
-            </a:pPr>
-            <a:r>
-              <a:t>All 5 agents status: PREPARED  |  Region: ap-south-1 (Mumbai)  |  100% Serverless</a:t>
-            </a:r>
-          </a:p>
-        </p:txBody>
-      </p:sp>
-      <p:sp>
-        <p:nvSpPr>
-          <p:cNvPr id="25" name="Rectangle 24"/>
+              <a:defRPr sz="1000" b="0">
+                <a:solidFill>
+                  <a:srgbClr val="CCCCCC"/>
+                </a:solidFill>
+                <a:latin typeface="Calibri"/>
+              </a:defRPr>
+            </a:pPr>
+            <a:r>
+              <a:t>Claude generates a formal</a:t>
+            </a:r>
+            <a:br/>
+            <a:r>
+              <a:t>proposal via RAG. Output is</a:t>
+            </a:r>
+            <a:br/>
+            <a:r>
+              <a:t>livestreamed to the user.</a:t>
+            </a:r>
+            <a:br/>
+            <a:r>
+              <a:t>PDF saved to S3 for download.</a:t>
+            </a:r>
+          </a:p>
+        </p:txBody>
+      </p:sp>
+      <p:sp>
+        <p:nvSpPr>
+          <p:cNvPr id="20" name="Rectangle 19"/>
           <p:cNvSpPr/>
           <p:nvPr/>
         </p:nvSpPr>
@@ -10883,7 +10331,7 @@
       </p:sp>
       <p:sp>
         <p:nvSpPr>
-          <p:cNvPr id="26" name="TextBox 25"/>
+          <p:cNvPr id="21" name="TextBox 20"/>
           <p:cNvSpPr txBox="1"/>
           <p:nvPr/>
         </p:nvSpPr>
@@ -10912,7 +10360,7 @@
               </a:defRPr>
             </a:pPr>
             <a:r>
-              <a:t>AI for Bharat Hackathon 2026  |  Powered by AWS  |  Track 03</a:t>
+              <a:t>Powered by AWS  |  AI for Bharat Hackathon 2026  |  Track 03</a:t>
             </a:r>
           </a:p>
         </p:txBody>
@@ -11017,7 +10465,7 @@
               </a:defRPr>
             </a:pPr>
             <a:r>
-              <a:t>Wireframes / Screenshots of the Working Prototype</a:t>
+              <a:t>Screenshots of the Working Prototype</a:t>
             </a:r>
           </a:p>
         </p:txBody>
@@ -11079,7 +10527,7 @@
         <p:spPr>
           <a:xfrm>
             <a:off x="274320" y="4663440"/>
-            <a:ext cx="5760720" cy="365760"/>
+            <a:ext cx="5760720" cy="274320"/>
           </a:xfrm>
           <a:prstGeom prst="rect">
             <a:avLst/>
@@ -11093,7 +10541,7 @@
           <a:lstStyle/>
           <a:p>
             <a:pPr algn="ctr">
-              <a:defRPr sz="1100" b="0">
+              <a:defRPr sz="1000" b="0">
                 <a:solidFill>
                   <a:srgbClr val="8899AA"/>
                 </a:solidFill>
@@ -11101,7 +10549,7 @@
               </a:defRPr>
             </a:pPr>
             <a:r>
-              <a:t>Dashboard — Live stats, compliance status, quick actions</a:t>
+              <a:t>Dashboard — compliance status, grants, quick actions</a:t>
             </a:r>
           </a:p>
         </p:txBody>
@@ -11115,7 +10563,7 @@
         <p:spPr>
           <a:xfrm>
             <a:off x="6217920" y="4663440"/>
-            <a:ext cx="5760720" cy="365760"/>
+            <a:ext cx="5760720" cy="274320"/>
           </a:xfrm>
           <a:prstGeom prst="rect">
             <a:avLst/>
@@ -11129,7 +10577,7 @@
           <a:lstStyle/>
           <a:p>
             <a:pPr algn="ctr">
-              <a:defRPr sz="1100" b="0">
+              <a:defRPr sz="1000" b="0">
                 <a:solidFill>
                   <a:srgbClr val="8899AA"/>
                 </a:solidFill>
@@ -11137,62 +10585,14 @@
               </a:defRPr>
             </a:pPr>
             <a:r>
-              <a:t>Grant Discovery — AI-matched CSR opportunities with scores</a:t>
-            </a:r>
-          </a:p>
-        </p:txBody>
-      </p:sp>
-      <p:pic>
-        <p:nvPicPr>
-          <p:cNvPr id="8" name="Picture 7" descr="compliance_1772968882563.png"/>
-          <p:cNvPicPr>
-            <a:picLocks noChangeAspect="1"/>
-          </p:cNvPicPr>
-          <p:nvPr/>
-        </p:nvPicPr>
-        <p:blipFill>
-          <a:blip r:embed="rId4"/>
-          <a:stretch>
-            <a:fillRect/>
-          </a:stretch>
-        </p:blipFill>
-        <p:spPr>
-          <a:xfrm>
-            <a:off x="274320" y="5120640"/>
-            <a:ext cx="3749039" cy="1554480"/>
-          </a:xfrm>
-          <a:prstGeom prst="rect">
-            <a:avLst/>
-          </a:prstGeom>
-        </p:spPr>
-      </p:pic>
-      <p:pic>
-        <p:nvPicPr>
-          <p:cNvPr id="9" name="Picture 8" descr="proposals_1772969030004.png"/>
-          <p:cNvPicPr>
-            <a:picLocks noChangeAspect="1"/>
-          </p:cNvPicPr>
-          <p:nvPr/>
-        </p:nvPicPr>
-        <p:blipFill>
-          <a:blip r:embed="rId5"/>
-          <a:stretch>
-            <a:fillRect/>
-          </a:stretch>
-        </p:blipFill>
-        <p:spPr>
-          <a:xfrm>
-            <a:off x="4206240" y="5120640"/>
-            <a:ext cx="3749039" cy="1554480"/>
-          </a:xfrm>
-          <a:prstGeom prst="rect">
-            <a:avLst/>
-          </a:prstGeom>
-        </p:spPr>
-      </p:pic>
-      <p:sp>
-        <p:nvSpPr>
-          <p:cNvPr id="10" name="Rectangle 9"/>
+              <a:t>Grant Discovery — AI-matched CSR opportunities</a:t>
+            </a:r>
+          </a:p>
+        </p:txBody>
+      </p:sp>
+      <p:sp>
+        <p:nvSpPr>
+          <p:cNvPr id="8" name="Rectangle 7"/>
           <p:cNvSpPr/>
           <p:nvPr/>
         </p:nvSpPr>
@@ -11235,7 +10635,7 @@
       </p:sp>
       <p:sp>
         <p:nvSpPr>
-          <p:cNvPr id="11" name="TextBox 10"/>
+          <p:cNvPr id="9" name="TextBox 8"/>
           <p:cNvSpPr txBox="1"/>
           <p:nvPr/>
         </p:nvSpPr>
@@ -11264,7 +10664,7 @@
               </a:defRPr>
             </a:pPr>
             <a:r>
-              <a:t>All screenshots from the LIVE running prototype on localhost:3000</a:t>
+              <a:t>All screenshots from the live running prototype</a:t>
             </a:r>
           </a:p>
         </p:txBody>
@@ -11369,7 +10769,7 @@
               </a:defRPr>
             </a:pPr>
             <a:r>
-              <a:t>Architecture Diagram: AWS Services</a:t>
+              <a:t>Architecture Diagram</a:t>
             </a:r>
           </a:p>
         </p:txBody>
@@ -11382,7 +10782,7 @@
         </p:nvSpPr>
         <p:spPr>
           <a:xfrm>
-            <a:off x="274320" y="1188720"/>
+            <a:off x="457200" y="1280160"/>
             <a:ext cx="2286000" cy="822960"/>
           </a:xfrm>
           <a:prstGeom prst="roundRect">
@@ -11438,7 +10838,7 @@
         </p:nvSpPr>
         <p:spPr>
           <a:xfrm>
-            <a:off x="2926080" y="1188720"/>
+            <a:off x="3200400" y="1280160"/>
             <a:ext cx="2286000" cy="822960"/>
           </a:xfrm>
           <a:prstGeom prst="roundRect">
@@ -11481,7 +10881,7 @@
             </a:r>
             <a:br/>
             <a:r>
-              <a:t>+ Cognito Auth</a:t>
+              <a:t>+ Cognito</a:t>
             </a:r>
           </a:p>
         </p:txBody>
@@ -11494,8 +10894,284 @@
         </p:nvSpPr>
         <p:spPr>
           <a:xfrm>
-            <a:off x="5577840" y="1188720"/>
-            <a:ext cx="2286000" cy="822960"/>
+            <a:off x="3200400" y="2560320"/>
+            <a:ext cx="5486400" cy="822960"/>
+          </a:xfrm>
+          <a:prstGeom prst="roundRect">
+            <a:avLst/>
+          </a:prstGeom>
+          <a:solidFill>
+            <a:srgbClr val="FF9933"/>
+          </a:solidFill>
+          <a:ln>
+            <a:noFill/>
+          </a:ln>
+        </p:spPr>
+        <p:style>
+          <a:lnRef idx="1">
+            <a:schemeClr val="accent1"/>
+          </a:lnRef>
+          <a:fillRef idx="3">
+            <a:schemeClr val="accent1"/>
+          </a:fillRef>
+          <a:effectRef idx="2">
+            <a:schemeClr val="accent1"/>
+          </a:effectRef>
+          <a:fontRef idx="minor">
+            <a:schemeClr val="lt1"/>
+          </a:fontRef>
+        </p:style>
+        <p:txBody>
+          <a:bodyPr rtlCol="0" anchor="ctr" wrap="square"/>
+          <a:lstStyle/>
+          <a:p>
+            <a:pPr algn="ctr">
+              <a:defRPr sz="1400" b="1">
+                <a:solidFill>
+                  <a:srgbClr val="FFFFFF"/>
+                </a:solidFill>
+              </a:defRPr>
+            </a:pPr>
+            <a:r>
+              <a:t>Amazon Bedrock Supervisor Agent</a:t>
+            </a:r>
+          </a:p>
+        </p:txBody>
+      </p:sp>
+      <p:sp>
+        <p:nvSpPr>
+          <p:cNvPr id="7" name="Rounded Rectangle 6"/>
+          <p:cNvSpPr/>
+          <p:nvPr/>
+        </p:nvSpPr>
+        <p:spPr>
+          <a:xfrm>
+            <a:off x="274320" y="3840480"/>
+            <a:ext cx="2560320" cy="822960"/>
+          </a:xfrm>
+          <a:prstGeom prst="roundRect">
+            <a:avLst/>
+          </a:prstGeom>
+          <a:solidFill>
+            <a:srgbClr val="4488FF"/>
+          </a:solidFill>
+          <a:ln>
+            <a:noFill/>
+          </a:ln>
+        </p:spPr>
+        <p:style>
+          <a:lnRef idx="1">
+            <a:schemeClr val="accent1"/>
+          </a:lnRef>
+          <a:fillRef idx="3">
+            <a:schemeClr val="accent1"/>
+          </a:fillRef>
+          <a:effectRef idx="2">
+            <a:schemeClr val="accent1"/>
+          </a:effectRef>
+          <a:fontRef idx="minor">
+            <a:schemeClr val="lt1"/>
+          </a:fontRef>
+        </p:style>
+        <p:txBody>
+          <a:bodyPr rtlCol="0" anchor="ctr" wrap="square"/>
+          <a:lstStyle/>
+          <a:p>
+            <a:pPr algn="ctr">
+              <a:defRPr sz="1000" b="1">
+                <a:solidFill>
+                  <a:srgbClr val="FFFFFF"/>
+                </a:solidFill>
+              </a:defRPr>
+            </a:pPr>
+            <a:r>
+              <a:t>Compliance</a:t>
+            </a:r>
+            <a:br/>
+            <a:r>
+              <a:t>Agent</a:t>
+            </a:r>
+          </a:p>
+        </p:txBody>
+      </p:sp>
+      <p:sp>
+        <p:nvSpPr>
+          <p:cNvPr id="8" name="Rounded Rectangle 7"/>
+          <p:cNvSpPr/>
+          <p:nvPr/>
+        </p:nvSpPr>
+        <p:spPr>
+          <a:xfrm>
+            <a:off x="3200400" y="3840480"/>
+            <a:ext cx="2560320" cy="822960"/>
+          </a:xfrm>
+          <a:prstGeom prst="roundRect">
+            <a:avLst/>
+          </a:prstGeom>
+          <a:solidFill>
+            <a:srgbClr val="FF9933"/>
+          </a:solidFill>
+          <a:ln>
+            <a:noFill/>
+          </a:ln>
+        </p:spPr>
+        <p:style>
+          <a:lnRef idx="1">
+            <a:schemeClr val="accent1"/>
+          </a:lnRef>
+          <a:fillRef idx="3">
+            <a:schemeClr val="accent1"/>
+          </a:fillRef>
+          <a:effectRef idx="2">
+            <a:schemeClr val="accent1"/>
+          </a:effectRef>
+          <a:fontRef idx="minor">
+            <a:schemeClr val="lt1"/>
+          </a:fontRef>
+        </p:style>
+        <p:txBody>
+          <a:bodyPr rtlCol="0" anchor="ctr" wrap="square"/>
+          <a:lstStyle/>
+          <a:p>
+            <a:pPr algn="ctr">
+              <a:defRPr sz="1000" b="1">
+                <a:solidFill>
+                  <a:srgbClr val="FFFFFF"/>
+                </a:solidFill>
+              </a:defRPr>
+            </a:pPr>
+            <a:r>
+              <a:t>Grant Scout</a:t>
+            </a:r>
+            <a:br/>
+            <a:r>
+              <a:t>Agent</a:t>
+            </a:r>
+          </a:p>
+        </p:txBody>
+      </p:sp>
+      <p:sp>
+        <p:nvSpPr>
+          <p:cNvPr id="9" name="Rounded Rectangle 8"/>
+          <p:cNvSpPr/>
+          <p:nvPr/>
+        </p:nvSpPr>
+        <p:spPr>
+          <a:xfrm>
+            <a:off x="6126480" y="3840480"/>
+            <a:ext cx="2560320" cy="822960"/>
+          </a:xfrm>
+          <a:prstGeom prst="roundRect">
+            <a:avLst/>
+          </a:prstGeom>
+          <a:solidFill>
+            <a:srgbClr val="AA44FF"/>
+          </a:solidFill>
+          <a:ln>
+            <a:noFill/>
+          </a:ln>
+        </p:spPr>
+        <p:style>
+          <a:lnRef idx="1">
+            <a:schemeClr val="accent1"/>
+          </a:lnRef>
+          <a:fillRef idx="3">
+            <a:schemeClr val="accent1"/>
+          </a:fillRef>
+          <a:effectRef idx="2">
+            <a:schemeClr val="accent1"/>
+          </a:effectRef>
+          <a:fontRef idx="minor">
+            <a:schemeClr val="lt1"/>
+          </a:fontRef>
+        </p:style>
+        <p:txBody>
+          <a:bodyPr rtlCol="0" anchor="ctr" wrap="square"/>
+          <a:lstStyle/>
+          <a:p>
+            <a:pPr algn="ctr">
+              <a:defRPr sz="1000" b="1">
+                <a:solidFill>
+                  <a:srgbClr val="FFFFFF"/>
+                </a:solidFill>
+              </a:defRPr>
+            </a:pPr>
+            <a:r>
+              <a:t>Proposal</a:t>
+            </a:r>
+            <a:br/>
+            <a:r>
+              <a:t>Agent</a:t>
+            </a:r>
+          </a:p>
+        </p:txBody>
+      </p:sp>
+      <p:sp>
+        <p:nvSpPr>
+          <p:cNvPr id="10" name="Rounded Rectangle 9"/>
+          <p:cNvSpPr/>
+          <p:nvPr/>
+        </p:nvSpPr>
+        <p:spPr>
+          <a:xfrm>
+            <a:off x="9052560" y="3840480"/>
+            <a:ext cx="2560320" cy="822960"/>
+          </a:xfrm>
+          <a:prstGeom prst="roundRect">
+            <a:avLst/>
+          </a:prstGeom>
+          <a:solidFill>
+            <a:srgbClr val="00CC66"/>
+          </a:solidFill>
+          <a:ln>
+            <a:noFill/>
+          </a:ln>
+        </p:spPr>
+        <p:style>
+          <a:lnRef idx="1">
+            <a:schemeClr val="accent1"/>
+          </a:lnRef>
+          <a:fillRef idx="3">
+            <a:schemeClr val="accent1"/>
+          </a:fillRef>
+          <a:effectRef idx="2">
+            <a:schemeClr val="accent1"/>
+          </a:effectRef>
+          <a:fontRef idx="minor">
+            <a:schemeClr val="lt1"/>
+          </a:fontRef>
+        </p:style>
+        <p:txBody>
+          <a:bodyPr rtlCol="0" anchor="ctr" wrap="square"/>
+          <a:lstStyle/>
+          <a:p>
+            <a:pPr algn="ctr">
+              <a:defRPr sz="1000" b="1">
+                <a:solidFill>
+                  <a:srgbClr val="FFFFFF"/>
+                </a:solidFill>
+              </a:defRPr>
+            </a:pPr>
+            <a:r>
+              <a:t>Impact</a:t>
+            </a:r>
+            <a:br/>
+            <a:r>
+              <a:t>Agent</a:t>
+            </a:r>
+          </a:p>
+        </p:txBody>
+      </p:sp>
+      <p:sp>
+        <p:nvSpPr>
+          <p:cNvPr id="11" name="Rounded Rectangle 10"/>
+          <p:cNvSpPr/>
+          <p:nvPr/>
+        </p:nvSpPr>
+        <p:spPr>
+          <a:xfrm>
+            <a:off x="8961120" y="1280160"/>
+            <a:ext cx="2926080" cy="640080"/>
           </a:xfrm>
           <a:prstGeom prst="roundRect">
             <a:avLst/>
@@ -11526,294 +11202,14 @@
           <a:lstStyle/>
           <a:p>
             <a:pPr algn="ctr">
-              <a:defRPr sz="1000" b="1">
+              <a:defRPr sz="900" b="1">
                 <a:solidFill>
                   <a:srgbClr val="FFFFFF"/>
                 </a:solidFill>
               </a:defRPr>
             </a:pPr>
             <a:r>
-              <a:t>Amazon S3</a:t>
-            </a:r>
-            <a:br/>
-            <a:r>
-              <a:t>(5 Buckets)</a:t>
-            </a:r>
-          </a:p>
-        </p:txBody>
-      </p:sp>
-      <p:sp>
-        <p:nvSpPr>
-          <p:cNvPr id="7" name="Rounded Rectangle 6"/>
-          <p:cNvSpPr/>
-          <p:nvPr/>
-        </p:nvSpPr>
-        <p:spPr>
-          <a:xfrm>
-            <a:off x="2926080" y="2377440"/>
-            <a:ext cx="5029200" cy="914400"/>
-          </a:xfrm>
-          <a:prstGeom prst="roundRect">
-            <a:avLst/>
-          </a:prstGeom>
-          <a:solidFill>
-            <a:srgbClr val="FF9933"/>
-          </a:solidFill>
-          <a:ln>
-            <a:noFill/>
-          </a:ln>
-        </p:spPr>
-        <p:style>
-          <a:lnRef idx="1">
-            <a:schemeClr val="accent1"/>
-          </a:lnRef>
-          <a:fillRef idx="3">
-            <a:schemeClr val="accent1"/>
-          </a:fillRef>
-          <a:effectRef idx="2">
-            <a:schemeClr val="accent1"/>
-          </a:effectRef>
-          <a:fontRef idx="minor">
-            <a:schemeClr val="lt1"/>
-          </a:fontRef>
-        </p:style>
-        <p:txBody>
-          <a:bodyPr rtlCol="0" anchor="ctr" wrap="square"/>
-          <a:lstStyle/>
-          <a:p>
-            <a:pPr algn="ctr">
-              <a:defRPr sz="1400" b="1">
-                <a:solidFill>
-                  <a:srgbClr val="FFFFFF"/>
-                </a:solidFill>
-              </a:defRPr>
-            </a:pPr>
-            <a:r>
-              <a:t>BEDROCK SUPERVISOR AGENT (HB82HPMIA3)</a:t>
-            </a:r>
-          </a:p>
-        </p:txBody>
-      </p:sp>
-      <p:sp>
-        <p:nvSpPr>
-          <p:cNvPr id="8" name="Rounded Rectangle 7"/>
-          <p:cNvSpPr/>
-          <p:nvPr/>
-        </p:nvSpPr>
-        <p:spPr>
-          <a:xfrm>
-            <a:off x="274320" y="3749039"/>
-            <a:ext cx="2560320" cy="822960"/>
-          </a:xfrm>
-          <a:prstGeom prst="roundRect">
-            <a:avLst/>
-          </a:prstGeom>
-          <a:solidFill>
-            <a:srgbClr val="4488FF"/>
-          </a:solidFill>
-          <a:ln>
-            <a:noFill/>
-          </a:ln>
-        </p:spPr>
-        <p:style>
-          <a:lnRef idx="1">
-            <a:schemeClr val="accent1"/>
-          </a:lnRef>
-          <a:fillRef idx="3">
-            <a:schemeClr val="accent1"/>
-          </a:fillRef>
-          <a:effectRef idx="2">
-            <a:schemeClr val="accent1"/>
-          </a:effectRef>
-          <a:fontRef idx="minor">
-            <a:schemeClr val="lt1"/>
-          </a:fontRef>
-        </p:style>
-        <p:txBody>
-          <a:bodyPr rtlCol="0" anchor="ctr" wrap="square"/>
-          <a:lstStyle/>
-          <a:p>
-            <a:pPr algn="ctr">
-              <a:defRPr sz="1000" b="1">
-                <a:solidFill>
-                  <a:srgbClr val="FFFFFF"/>
-                </a:solidFill>
-              </a:defRPr>
-            </a:pPr>
-            <a:r>
-              <a:t>Compliance</a:t>
-            </a:r>
-            <a:br/>
-            <a:r>
-              <a:t>(GFOH0VN)</a:t>
-            </a:r>
-          </a:p>
-        </p:txBody>
-      </p:sp>
-      <p:sp>
-        <p:nvSpPr>
-          <p:cNvPr id="9" name="Rounded Rectangle 8"/>
-          <p:cNvSpPr/>
-          <p:nvPr/>
-        </p:nvSpPr>
-        <p:spPr>
-          <a:xfrm>
-            <a:off x="3200400" y="3749039"/>
-            <a:ext cx="2560320" cy="822960"/>
-          </a:xfrm>
-          <a:prstGeom prst="roundRect">
-            <a:avLst/>
-          </a:prstGeom>
-          <a:solidFill>
-            <a:srgbClr val="FF8800"/>
-          </a:solidFill>
-          <a:ln>
-            <a:noFill/>
-          </a:ln>
-        </p:spPr>
-        <p:style>
-          <a:lnRef idx="1">
-            <a:schemeClr val="accent1"/>
-          </a:lnRef>
-          <a:fillRef idx="3">
-            <a:schemeClr val="accent1"/>
-          </a:fillRef>
-          <a:effectRef idx="2">
-            <a:schemeClr val="accent1"/>
-          </a:effectRef>
-          <a:fontRef idx="minor">
-            <a:schemeClr val="lt1"/>
-          </a:fontRef>
-        </p:style>
-        <p:txBody>
-          <a:bodyPr rtlCol="0" anchor="ctr" wrap="square"/>
-          <a:lstStyle/>
-          <a:p>
-            <a:pPr algn="ctr">
-              <a:defRPr sz="1000" b="1">
-                <a:solidFill>
-                  <a:srgbClr val="FFFFFF"/>
-                </a:solidFill>
-              </a:defRPr>
-            </a:pPr>
-            <a:r>
-              <a:t>Grant Scout</a:t>
-            </a:r>
-            <a:br/>
-            <a:r>
-              <a:t>(KRPTCZMV)</a:t>
-            </a:r>
-          </a:p>
-        </p:txBody>
-      </p:sp>
-      <p:sp>
-        <p:nvSpPr>
-          <p:cNvPr id="10" name="Rounded Rectangle 9"/>
-          <p:cNvSpPr/>
-          <p:nvPr/>
-        </p:nvSpPr>
-        <p:spPr>
-          <a:xfrm>
-            <a:off x="6126480" y="3749039"/>
-            <a:ext cx="2560320" cy="822960"/>
-          </a:xfrm>
-          <a:prstGeom prst="roundRect">
-            <a:avLst/>
-          </a:prstGeom>
-          <a:solidFill>
-            <a:srgbClr val="AA44FF"/>
-          </a:solidFill>
-          <a:ln>
-            <a:noFill/>
-          </a:ln>
-        </p:spPr>
-        <p:style>
-          <a:lnRef idx="1">
-            <a:schemeClr val="accent1"/>
-          </a:lnRef>
-          <a:fillRef idx="3">
-            <a:schemeClr val="accent1"/>
-          </a:fillRef>
-          <a:effectRef idx="2">
-            <a:schemeClr val="accent1"/>
-          </a:effectRef>
-          <a:fontRef idx="minor">
-            <a:schemeClr val="lt1"/>
-          </a:fontRef>
-        </p:style>
-        <p:txBody>
-          <a:bodyPr rtlCol="0" anchor="ctr" wrap="square"/>
-          <a:lstStyle/>
-          <a:p>
-            <a:pPr algn="ctr">
-              <a:defRPr sz="1000" b="1">
-                <a:solidFill>
-                  <a:srgbClr val="FFFFFF"/>
-                </a:solidFill>
-              </a:defRPr>
-            </a:pPr>
-            <a:r>
-              <a:t>Proposal</a:t>
-            </a:r>
-            <a:br/>
-            <a:r>
-              <a:t>(23TIS55Z)</a:t>
-            </a:r>
-          </a:p>
-        </p:txBody>
-      </p:sp>
-      <p:sp>
-        <p:nvSpPr>
-          <p:cNvPr id="11" name="Rounded Rectangle 10"/>
-          <p:cNvSpPr/>
-          <p:nvPr/>
-        </p:nvSpPr>
-        <p:spPr>
-          <a:xfrm>
-            <a:off x="9052560" y="3749039"/>
-            <a:ext cx="2560320" cy="822960"/>
-          </a:xfrm>
-          <a:prstGeom prst="roundRect">
-            <a:avLst/>
-          </a:prstGeom>
-          <a:solidFill>
-            <a:srgbClr val="00CC66"/>
-          </a:solidFill>
-          <a:ln>
-            <a:noFill/>
-          </a:ln>
-        </p:spPr>
-        <p:style>
-          <a:lnRef idx="1">
-            <a:schemeClr val="accent1"/>
-          </a:lnRef>
-          <a:fillRef idx="3">
-            <a:schemeClr val="accent1"/>
-          </a:fillRef>
-          <a:effectRef idx="2">
-            <a:schemeClr val="accent1"/>
-          </a:effectRef>
-          <a:fontRef idx="minor">
-            <a:schemeClr val="lt1"/>
-          </a:fontRef>
-        </p:style>
-        <p:txBody>
-          <a:bodyPr rtlCol="0" anchor="ctr" wrap="square"/>
-          <a:lstStyle/>
-          <a:p>
-            <a:pPr algn="ctr">
-              <a:defRPr sz="1000" b="1">
-                <a:solidFill>
-                  <a:srgbClr val="FFFFFF"/>
-                </a:solidFill>
-              </a:defRPr>
-            </a:pPr>
-            <a:r>
-              <a:t>Impact</a:t>
-            </a:r>
-            <a:br/>
-            <a:r>
-              <a:t>(PHLYZYB1)</a:t>
+              <a:t>Amazon Textract</a:t>
             </a:r>
           </a:p>
         </p:txBody>
@@ -11826,8 +11222,8 @@
         </p:nvSpPr>
         <p:spPr>
           <a:xfrm>
-            <a:off x="8686800" y="1188720"/>
-            <a:ext cx="3200400" cy="640080"/>
+            <a:off x="8961120" y="2057400"/>
+            <a:ext cx="2926080" cy="640080"/>
           </a:xfrm>
           <a:prstGeom prst="roundRect">
             <a:avLst/>
@@ -11865,7 +11261,7 @@
               </a:defRPr>
             </a:pPr>
             <a:r>
-              <a:t>Amazon Textract</a:t>
+              <a:t>KB: CSR Laws</a:t>
             </a:r>
           </a:p>
         </p:txBody>
@@ -11878,8 +11274,8 @@
         </p:nvSpPr>
         <p:spPr>
           <a:xfrm>
-            <a:off x="8686800" y="1965960"/>
-            <a:ext cx="3200400" cy="640080"/>
+            <a:off x="8961120" y="2834639"/>
+            <a:ext cx="2926080" cy="640080"/>
           </a:xfrm>
           <a:prstGeom prst="roundRect">
             <a:avLst/>
@@ -11917,7 +11313,7 @@
               </a:defRPr>
             </a:pPr>
             <a:r>
-              <a:t>KB: CSR Laws (WUIYUPN7I2)</a:t>
+              <a:t>KB: CSR Opportunities</a:t>
             </a:r>
           </a:p>
         </p:txBody>
@@ -11930,8 +11326,8 @@
         </p:nvSpPr>
         <p:spPr>
           <a:xfrm>
-            <a:off x="8686800" y="2743200"/>
-            <a:ext cx="3200400" cy="640080"/>
+            <a:off x="8961120" y="3611879"/>
+            <a:ext cx="2926080" cy="640080"/>
           </a:xfrm>
           <a:prstGeom prst="roundRect">
             <a:avLst/>
@@ -11969,7 +11365,7 @@
               </a:defRPr>
             </a:pPr>
             <a:r>
-              <a:t>KB: CSR Opps (UMGDGC60BJ)</a:t>
+              <a:t>KB: Proposals</a:t>
             </a:r>
           </a:p>
         </p:txBody>
@@ -11982,8 +11378,8 @@
         </p:nvSpPr>
         <p:spPr>
           <a:xfrm>
-            <a:off x="8686800" y="3520439"/>
-            <a:ext cx="3200400" cy="640080"/>
+            <a:off x="274320" y="5120640"/>
+            <a:ext cx="2560320" cy="502920"/>
           </a:xfrm>
           <a:prstGeom prst="roundRect">
             <a:avLst/>
@@ -12021,7 +11417,7 @@
               </a:defRPr>
             </a:pPr>
             <a:r>
-              <a:t>KB: Proposals (GXLH46FI6K)</a:t>
+              <a:t>Lambda x4 (Python)</a:t>
             </a:r>
           </a:p>
         </p:txBody>
@@ -12034,7 +11430,7 @@
         </p:nvSpPr>
         <p:spPr>
           <a:xfrm>
-            <a:off x="274320" y="4937760"/>
+            <a:off x="3200400" y="5120640"/>
             <a:ext cx="2560320" cy="502920"/>
           </a:xfrm>
           <a:prstGeom prst="roundRect">
@@ -12066,14 +11462,14 @@
           <a:lstStyle/>
           <a:p>
             <a:pPr algn="ctr">
-              <a:defRPr sz="800" b="1">
+              <a:defRPr sz="900" b="1">
                 <a:solidFill>
                   <a:srgbClr val="FFFFFF"/>
                 </a:solidFill>
               </a:defRPr>
             </a:pPr>
             <a:r>
-              <a:t>Lambda: nidhiai-scan-documents</a:t>
+              <a:t>Amazon S3 (5 buckets)</a:t>
             </a:r>
           </a:p>
         </p:txBody>
@@ -12086,7 +11482,7 @@
         </p:nvSpPr>
         <p:spPr>
           <a:xfrm>
-            <a:off x="3200400" y="4937760"/>
+            <a:off x="6126480" y="5120640"/>
             <a:ext cx="2560320" cy="502920"/>
           </a:xfrm>
           <a:prstGeom prst="roundRect">
@@ -12118,14 +11514,14 @@
           <a:lstStyle/>
           <a:p>
             <a:pPr algn="ctr">
-              <a:defRPr sz="800" b="1">
+              <a:defRPr sz="900" b="1">
                 <a:solidFill>
                   <a:srgbClr val="FFFFFF"/>
                 </a:solidFill>
               </a:defRPr>
             </a:pPr>
             <a:r>
-              <a:t>Lambda: nidhiai-match-grants</a:t>
+              <a:t>DynamoDB (4 tables)</a:t>
             </a:r>
           </a:p>
         </p:txBody>
@@ -12138,7 +11534,7 @@
         </p:nvSpPr>
         <p:spPr>
           <a:xfrm>
-            <a:off x="6126480" y="4937760"/>
+            <a:off x="9052560" y="5120640"/>
             <a:ext cx="2560320" cy="502920"/>
           </a:xfrm>
           <a:prstGeom prst="roundRect">
@@ -12170,34 +11566,70 @@
           <a:lstStyle/>
           <a:p>
             <a:pPr algn="ctr">
-              <a:defRPr sz="800" b="1">
+              <a:defRPr sz="900" b="1">
                 <a:solidFill>
                   <a:srgbClr val="FFFFFF"/>
                 </a:solidFill>
               </a:defRPr>
             </a:pPr>
             <a:r>
-              <a:t>Lambda: nidhiai-generate-pdf</a:t>
-            </a:r>
-          </a:p>
-        </p:txBody>
-      </p:sp>
-      <p:sp>
-        <p:nvSpPr>
-          <p:cNvPr id="19" name="Rounded Rectangle 18"/>
+              <a:t>OpenSearch Serverless</a:t>
+            </a:r>
+          </a:p>
+        </p:txBody>
+      </p:sp>
+      <p:sp>
+        <p:nvSpPr>
+          <p:cNvPr id="19" name="TextBox 18"/>
+          <p:cNvSpPr txBox="1"/>
+          <p:nvPr/>
+        </p:nvSpPr>
+        <p:spPr>
+          <a:xfrm>
+            <a:off x="457200" y="5852160"/>
+            <a:ext cx="10972800" cy="274320"/>
+          </a:xfrm>
+          <a:prstGeom prst="rect">
+            <a:avLst/>
+          </a:prstGeom>
+          <a:noFill/>
+        </p:spPr>
+        <p:txBody>
+          <a:bodyPr wrap="square">
+            <a:spAutoFit/>
+          </a:bodyPr>
+          <a:lstStyle/>
+          <a:p>
+            <a:pPr algn="ctr">
+              <a:defRPr sz="1100" b="0">
+                <a:solidFill>
+                  <a:srgbClr val="8899AA"/>
+                </a:solidFill>
+                <a:latin typeface="Calibri"/>
+              </a:defRPr>
+            </a:pPr>
+            <a:r>
+              <a:t>Region: ap-south-1 (Mumbai)  |  100% Serverless  |  12 AWS Services</a:t>
+            </a:r>
+          </a:p>
+        </p:txBody>
+      </p:sp>
+      <p:sp>
+        <p:nvSpPr>
+          <p:cNvPr id="20" name="Rectangle 19"/>
           <p:cNvSpPr/>
           <p:nvPr/>
         </p:nvSpPr>
         <p:spPr>
           <a:xfrm>
-            <a:off x="9052560" y="4937760"/>
-            <a:ext cx="2560320" cy="502920"/>
-          </a:xfrm>
-          <a:prstGeom prst="roundRect">
+            <a:off x="0" y="6309360"/>
+            <a:ext cx="12191695" cy="548640"/>
+          </a:xfrm>
+          <a:prstGeom prst="rect">
             <a:avLst/>
           </a:prstGeom>
           <a:solidFill>
-            <a:srgbClr val="225599"/>
+            <a:srgbClr val="14243B"/>
           </a:solidFill>
           <a:ln>
             <a:noFill/>
@@ -12218,135 +11650,22 @@
           </a:fontRef>
         </p:style>
         <p:txBody>
-          <a:bodyPr rtlCol="0" anchor="ctr" wrap="square"/>
-          <a:lstStyle/>
-          <a:p>
-            <a:pPr algn="ctr">
-              <a:defRPr sz="800" b="1">
-                <a:solidFill>
-                  <a:srgbClr val="FFFFFF"/>
-                </a:solidFill>
-              </a:defRPr>
-            </a:pPr>
-            <a:r>
-              <a:t>Lambda: nidhiai-generate-report</a:t>
-            </a:r>
-          </a:p>
-        </p:txBody>
-      </p:sp>
-      <p:sp>
-        <p:nvSpPr>
-          <p:cNvPr id="20" name="Rounded Rectangle 19"/>
-          <p:cNvSpPr/>
-          <p:nvPr/>
-        </p:nvSpPr>
-        <p:spPr>
-          <a:xfrm>
-            <a:off x="2926080" y="5577840"/>
-            <a:ext cx="3200400" cy="502920"/>
-          </a:xfrm>
-          <a:prstGeom prst="roundRect">
-            <a:avLst/>
-          </a:prstGeom>
-          <a:solidFill>
-            <a:srgbClr val="225599"/>
-          </a:solidFill>
-          <a:ln>
-            <a:noFill/>
-          </a:ln>
-        </p:spPr>
-        <p:style>
-          <a:lnRef idx="1">
-            <a:schemeClr val="accent1"/>
-          </a:lnRef>
-          <a:fillRef idx="3">
-            <a:schemeClr val="accent1"/>
-          </a:fillRef>
-          <a:effectRef idx="2">
-            <a:schemeClr val="accent1"/>
-          </a:effectRef>
-          <a:fontRef idx="minor">
-            <a:schemeClr val="lt1"/>
-          </a:fontRef>
-        </p:style>
-        <p:txBody>
-          <a:bodyPr rtlCol="0" anchor="ctr" wrap="square"/>
-          <a:lstStyle/>
-          <a:p>
-            <a:pPr algn="ctr">
-              <a:defRPr sz="900" b="1">
-                <a:solidFill>
-                  <a:srgbClr val="FFFFFF"/>
-                </a:solidFill>
-              </a:defRPr>
-            </a:pPr>
-            <a:r>
-              <a:t>Amazon DynamoDB (4 tables)</a:t>
-            </a:r>
-          </a:p>
-        </p:txBody>
-      </p:sp>
-      <p:sp>
-        <p:nvSpPr>
-          <p:cNvPr id="21" name="Rounded Rectangle 20"/>
-          <p:cNvSpPr/>
-          <p:nvPr/>
-        </p:nvSpPr>
-        <p:spPr>
-          <a:xfrm>
-            <a:off x="6400800" y="5577840"/>
-            <a:ext cx="3200400" cy="502920"/>
-          </a:xfrm>
-          <a:prstGeom prst="roundRect">
-            <a:avLst/>
-          </a:prstGeom>
-          <a:solidFill>
-            <a:srgbClr val="225599"/>
-          </a:solidFill>
-          <a:ln>
-            <a:noFill/>
-          </a:ln>
-        </p:spPr>
-        <p:style>
-          <a:lnRef idx="1">
-            <a:schemeClr val="accent1"/>
-          </a:lnRef>
-          <a:fillRef idx="3">
-            <a:schemeClr val="accent1"/>
-          </a:fillRef>
-          <a:effectRef idx="2">
-            <a:schemeClr val="accent1"/>
-          </a:effectRef>
-          <a:fontRef idx="minor">
-            <a:schemeClr val="lt1"/>
-          </a:fontRef>
-        </p:style>
-        <p:txBody>
-          <a:bodyPr rtlCol="0" anchor="ctr" wrap="square"/>
-          <a:lstStyle/>
-          <a:p>
-            <a:pPr algn="ctr">
-              <a:defRPr sz="900" b="1">
-                <a:solidFill>
-                  <a:srgbClr val="FFFFFF"/>
-                </a:solidFill>
-              </a:defRPr>
-            </a:pPr>
-            <a:r>
-              <a:t>OpenSearch Serverless (Vector DB)</a:t>
-            </a:r>
-          </a:p>
-        </p:txBody>
-      </p:sp>
-      <p:sp>
-        <p:nvSpPr>
-          <p:cNvPr id="22" name="TextBox 21"/>
+          <a:bodyPr rtlCol="0" anchor="ctr"/>
+          <a:lstStyle/>
+          <a:p>
+            <a:pPr algn="ctr"/>
+          </a:p>
+        </p:txBody>
+      </p:sp>
+      <p:sp>
+        <p:nvSpPr>
+          <p:cNvPr id="21" name="TextBox 20"/>
           <p:cNvSpPr txBox="1"/>
           <p:nvPr/>
         </p:nvSpPr>
         <p:spPr>
           <a:xfrm>
-            <a:off x="457200" y="6217920"/>
+            <a:off x="457200" y="6355080"/>
             <a:ext cx="10972800" cy="365760"/>
           </a:xfrm>
           <a:prstGeom prst="rect">
@@ -12369,7 +11688,7 @@
               </a:defRPr>
             </a:pPr>
             <a:r>
-              <a:t>All services in ap-south-1 (Mumbai)  |  100% Serverless  |  12 AWS Services</a:t>
+              <a:t>Powered by AWS  |  AI for Bharat Hackathon 2026  |  Track 03</a:t>
             </a:r>
           </a:p>
         </p:txBody>
@@ -12474,7 +11793,7 @@
               </a:defRPr>
             </a:pPr>
             <a:r>
-              <a:t>Technologies Utilized in the Solution</a:t>
+              <a:t>Technologies Utilized</a:t>
             </a:r>
           </a:p>
         </p:txBody>
@@ -12555,7 +11874,7 @@
               </a:defRPr>
             </a:pPr>
             <a:r>
-              <a:t>AI &amp; ML Layer</a:t>
+              <a:t>AI &amp; ML</a:t>
             </a:r>
           </a:p>
         </p:txBody>
@@ -12594,7 +11913,7 @@
               </a:defRPr>
             </a:pPr>
             <a:r>
-              <a:t>  Amazon Bedrock Agents (Supervisor Pattern, 5 agents)</a:t>
+              <a:t>  Amazon Bedrock Agents (Supervisor Pattern)</a:t>
             </a:r>
           </a:p>
           <a:p>
@@ -12610,7 +11929,7 @@
               </a:defRPr>
             </a:pPr>
             <a:r>
-              <a:t>  Amazon Bedrock Knowledge Bases (3 KBs, ACTIVE)</a:t>
+              <a:t>  Amazon Bedrock Knowledge Bases (x3)</a:t>
             </a:r>
           </a:p>
           <a:p>
@@ -12642,7 +11961,7 @@
               </a:defRPr>
             </a:pPr>
             <a:r>
-              <a:t>  Foundation Models: Claude 3.5 Sonnet / Amazon Nova 2 Lite</a:t>
+              <a:t>  Foundation Models: Claude 3.5 Sonnet, Amazon Nova Lite</a:t>
             </a:r>
           </a:p>
         </p:txBody>
@@ -12762,7 +12081,7 @@
               </a:defRPr>
             </a:pPr>
             <a:r>
-              <a:t>  Amazon Textract (OCR + Form Extraction)</a:t>
+              <a:t>  Amazon Textract (OCR + form extraction)</a:t>
             </a:r>
           </a:p>
           <a:p>
@@ -12778,7 +12097,7 @@
               </a:defRPr>
             </a:pPr>
             <a:r>
-              <a:t>  Scans 12A, 80G, CSR-1 govt certificates</a:t>
+              <a:t>  Reads 12A, 80G, CSR-1 govt certificates</a:t>
             </a:r>
           </a:p>
           <a:p>
@@ -12795,22 +12114,6 @@
             </a:pPr>
             <a:r>
               <a:t>  Extracts registration numbers and expiry dates</a:t>
-            </a:r>
-          </a:p>
-          <a:p>
-            <a:pPr>
-              <a:spcAft>
-                <a:spcPts val="400"/>
-              </a:spcAft>
-              <a:defRPr sz="1100">
-                <a:solidFill>
-                  <a:srgbClr val="FFFFFF"/>
-                </a:solidFill>
-                <a:latin typeface="Calibri"/>
-              </a:defRPr>
-            </a:pPr>
-            <a:r>
-              <a:t>  Available natively in ap-south-1 (Mumbai)</a:t>
             </a:r>
           </a:p>
         </p:txBody>
@@ -12930,7 +12233,7 @@
               </a:defRPr>
             </a:pPr>
             <a:r>
-              <a:t>  AWS Lambda x4 (Python 3.12, 256MB, 90s timeout)</a:t>
+              <a:t>  AWS Lambda — 4 functions (Python 3.12)</a:t>
             </a:r>
           </a:p>
           <a:p>
@@ -12946,7 +12249,7 @@
               </a:defRPr>
             </a:pPr>
             <a:r>
-              <a:t>  Amazon S3 x5 buckets (docs, PDFs, 3 KB data sources)</a:t>
+              <a:t>  Amazon S3 — 5 buckets</a:t>
             </a:r>
           </a:p>
           <a:p>
@@ -12962,7 +12265,7 @@
               </a:defRPr>
             </a:pPr>
             <a:r>
-              <a:t>  Amazon OpenSearch Serverless (vector database)</a:t>
+              <a:t>  Amazon OpenSearch Serverless (vector DB)</a:t>
             </a:r>
           </a:p>
           <a:p>
@@ -12978,7 +12281,7 @@
               </a:defRPr>
             </a:pPr>
             <a:r>
-              <a:t>  Amazon API Gateway (REST) + Amazon DynamoDB x4</a:t>
+              <a:t>  Amazon API Gateway + Amazon DynamoDB</a:t>
             </a:r>
           </a:p>
         </p:txBody>
@@ -13098,7 +12401,7 @@
               </a:defRPr>
             </a:pPr>
             <a:r>
-              <a:t>  Next.js 16 (React 19, Server Components)</a:t>
+              <a:t>  Next.js 16 (React 19) + TailwindCSS</a:t>
             </a:r>
           </a:p>
           <a:p>
@@ -13114,7 +12417,7 @@
               </a:defRPr>
             </a:pPr>
             <a:r>
-              <a:t>  TailwindCSS + custom dark/light theme system</a:t>
+              <a:t>  Amazon Cognito (user authentication)</a:t>
             </a:r>
           </a:p>
           <a:p>
@@ -13130,23 +12433,7 @@
               </a:defRPr>
             </a:pPr>
             <a:r>
-              <a:t>  Amazon Cognito (user authentication &amp; sessions)</a:t>
-            </a:r>
-          </a:p>
-          <a:p>
-            <a:pPr>
-              <a:spcAft>
-                <a:spcPts val="400"/>
-              </a:spcAft>
-              <a:defRPr sz="1100">
-                <a:solidFill>
-                  <a:srgbClr val="FFFFFF"/>
-                </a:solidFill>
-                <a:latin typeface="Calibri"/>
-              </a:defRPr>
-            </a:pPr>
-            <a:r>
-              <a:t>  Deployed on Vercel (CDN, Edge Functions)</a:t>
+              <a:t>  Deployed on Vercel (CDN + Edge)</a:t>
             </a:r>
           </a:p>
         </p:txBody>
@@ -13225,7 +12512,7 @@
               </a:defRPr>
             </a:pPr>
             <a:r>
-              <a:t>AI for Bharat Hackathon 2026  |  Powered by AWS  |  Track 03</a:t>
+              <a:t>Powered by AWS  |  AI for Bharat Hackathon 2026  |  Track 03</a:t>
             </a:r>
           </a:p>
         </p:txBody>
@@ -14015,7 +13302,7 @@
               </a:defRPr>
             </a:pPr>
             <a:r>
-              <a:t>AI-matched (5+ corps)</a:t>
+              <a:t>AI-matched</a:t>
             </a:r>
           </a:p>
         </p:txBody>
@@ -14166,7 +13453,7 @@
               </a:defRPr>
             </a:pPr>
             <a:r>
-              <a:t>Automated via Textract</a:t>
+              <a:t>Automated (Textract)</a:t>
             </a:r>
           </a:p>
         </p:txBody>
@@ -14398,11 +13685,11 @@
               </a:defRPr>
             </a:pPr>
             <a:r>
-              <a:t>5000x cheaper per proposal  |  200x faster delivery</a:t>
+              <a:t>5000x cost reduction per proposal</a:t>
             </a:r>
             <a:br/>
             <a:r>
-              <a:t>Prototype spend to date: &lt; Rs.8,000</a:t>
+              <a:t>Serverless = zero cost when idle</a:t>
             </a:r>
           </a:p>
         </p:txBody>
@@ -14483,7 +13770,7 @@
               </a:defRPr>
             </a:pPr>
             <a:r>
-              <a:t>Revenue Model (100 NGOs)</a:t>
+              <a:t>Prototype Spend Breakdown</a:t>
             </a:r>
           </a:p>
         </p:txBody>
@@ -14562,7 +13849,7 @@
               </a:defRPr>
             </a:pPr>
             <a:r>
-              <a:t>Free Tier</a:t>
+              <a:t>Service</a:t>
             </a:r>
           </a:p>
         </p:txBody>
@@ -14598,7 +13885,7 @@
               </a:defRPr>
             </a:pPr>
             <a:r>
-              <a:t>5 proposals/month (Rs.0)</a:t>
+              <a:t>Monthly Cost</a:t>
             </a:r>
           </a:p>
         </p:txBody>
@@ -14677,7 +13964,7 @@
               </a:defRPr>
             </a:pPr>
             <a:r>
-              <a:t>Premium Plan</a:t>
+              <a:t>Lambda / API Gateway / DynamoDB</a:t>
             </a:r>
           </a:p>
         </p:txBody>
@@ -14707,13 +13994,13 @@
             <a:pPr algn="r">
               <a:defRPr sz="1100" b="0">
                 <a:solidFill>
-                  <a:srgbClr val="FFFFFF"/>
-                </a:solidFill>
-                <a:latin typeface="Calibri"/>
-              </a:defRPr>
-            </a:pPr>
-            <a:r>
-              <a:t>Unlimited (Rs.999/NGO/mo)</a:t>
+                  <a:srgbClr val="00CC66"/>
+                </a:solidFill>
+                <a:latin typeface="Calibri"/>
+              </a:defRPr>
+            </a:pPr>
+            <a:r>
+              <a:t>AWS Free Tier</a:t>
             </a:r>
           </a:p>
         </p:txBody>
@@ -14792,7 +14079,7 @@
               </a:defRPr>
             </a:pPr>
             <a:r>
-              <a:t>100 NGOs on Premium</a:t>
+              <a:t>Bedrock model inference</a:t>
             </a:r>
           </a:p>
         </p:txBody>
@@ -14828,7 +14115,7 @@
               </a:defRPr>
             </a:pPr>
             <a:r>
-              <a:t>Rs.99,900/month revenue</a:t>
+              <a:t>~Rs.800</a:t>
             </a:r>
           </a:p>
         </p:txBody>
@@ -14907,7 +14194,7 @@
               </a:defRPr>
             </a:pPr>
             <a:r>
-              <a:t>AWS Infra Cost</a:t>
+              <a:t>S3 storage (all buckets)</a:t>
             </a:r>
           </a:p>
         </p:txBody>
@@ -14943,7 +14230,7 @@
               </a:defRPr>
             </a:pPr>
             <a:r>
-              <a:t>~Rs.17,000/month (~$204)</a:t>
+              <a:t>&lt; Rs.50</a:t>
             </a:r>
           </a:p>
         </p:txBody>
@@ -15022,7 +14309,7 @@
               </a:defRPr>
             </a:pPr>
             <a:r>
-              <a:t>Gross Margin</a:t>
+              <a:t>OpenSearch Serverless</a:t>
             </a:r>
           </a:p>
         </p:txBody>
@@ -15052,13 +14339,13 @@
             <a:pPr algn="r">
               <a:defRPr sz="1100" b="0">
                 <a:solidFill>
-                  <a:srgbClr val="00CC66"/>
-                </a:solidFill>
-                <a:latin typeface="Calibri"/>
-              </a:defRPr>
-            </a:pPr>
-            <a:r>
-              <a:t>~83%</a:t>
+                  <a:srgbClr val="FFFFFF"/>
+                </a:solidFill>
+                <a:latin typeface="Calibri"/>
+              </a:defRPr>
+            </a:pPr>
+            <a:r>
+              <a:t>Min-capacity provisions</a:t>
             </a:r>
           </a:p>
         </p:txBody>
@@ -15137,7 +14424,7 @@
               </a:defRPr>
             </a:pPr>
             <a:r>
-              <a:t>Break-even</a:t>
+              <a:t>Total prototype spend to date</a:t>
             </a:r>
           </a:p>
         </p:txBody>
@@ -15173,7 +14460,7 @@
               </a:defRPr>
             </a:pPr>
             <a:r>
-              <a:t>18 paying NGOs</a:t>
+              <a:t>&lt; Rs.8,000</a:t>
             </a:r>
           </a:p>
         </p:txBody>
@@ -15181,121 +14468,6 @@
       <p:sp>
         <p:nvSpPr>
           <p:cNvPr id="52" name="Rectangle 51"/>
-          <p:cNvSpPr/>
-          <p:nvPr/>
-        </p:nvSpPr>
-        <p:spPr>
-          <a:xfrm>
-            <a:off x="6583680" y="4572000"/>
-            <a:ext cx="4846320" cy="411480"/>
-          </a:xfrm>
-          <a:prstGeom prst="rect">
-            <a:avLst/>
-          </a:prstGeom>
-          <a:solidFill>
-            <a:srgbClr val="0D1B2A"/>
-          </a:solidFill>
-          <a:ln>
-            <a:noFill/>
-          </a:ln>
-        </p:spPr>
-        <p:style>
-          <a:lnRef idx="1">
-            <a:schemeClr val="accent1"/>
-          </a:lnRef>
-          <a:fillRef idx="3">
-            <a:schemeClr val="accent1"/>
-          </a:fillRef>
-          <a:effectRef idx="2">
-            <a:schemeClr val="accent1"/>
-          </a:effectRef>
-          <a:fontRef idx="minor">
-            <a:schemeClr val="lt1"/>
-          </a:fontRef>
-        </p:style>
-        <p:txBody>
-          <a:bodyPr rtlCol="0" anchor="ctr"/>
-          <a:lstStyle/>
-          <a:p>
-            <a:pPr algn="ctr"/>
-          </a:p>
-        </p:txBody>
-      </p:sp>
-      <p:sp>
-        <p:nvSpPr>
-          <p:cNvPr id="53" name="TextBox 52"/>
-          <p:cNvSpPr txBox="1"/>
-          <p:nvPr/>
-        </p:nvSpPr>
-        <p:spPr>
-          <a:xfrm>
-            <a:off x="6720840" y="4599432"/>
-            <a:ext cx="2423160" cy="320040"/>
-          </a:xfrm>
-          <a:prstGeom prst="rect">
-            <a:avLst/>
-          </a:prstGeom>
-          <a:noFill/>
-        </p:spPr>
-        <p:txBody>
-          <a:bodyPr wrap="square">
-            <a:spAutoFit/>
-          </a:bodyPr>
-          <a:lstStyle/>
-          <a:p>
-            <a:pPr algn="l">
-              <a:defRPr sz="1100" b="0">
-                <a:solidFill>
-                  <a:srgbClr val="FFFFFF"/>
-                </a:solidFill>
-                <a:latin typeface="Calibri"/>
-              </a:defRPr>
-            </a:pPr>
-            <a:r>
-              <a:t>B2B: CSR Consultants</a:t>
-            </a:r>
-          </a:p>
-        </p:txBody>
-      </p:sp>
-      <p:sp>
-        <p:nvSpPr>
-          <p:cNvPr id="54" name="TextBox 53"/>
-          <p:cNvSpPr txBox="1"/>
-          <p:nvPr/>
-        </p:nvSpPr>
-        <p:spPr>
-          <a:xfrm>
-            <a:off x="9006840" y="4599432"/>
-            <a:ext cx="2180844" cy="320040"/>
-          </a:xfrm>
-          <a:prstGeom prst="rect">
-            <a:avLst/>
-          </a:prstGeom>
-          <a:noFill/>
-        </p:spPr>
-        <p:txBody>
-          <a:bodyPr wrap="square">
-            <a:spAutoFit/>
-          </a:bodyPr>
-          <a:lstStyle/>
-          <a:p>
-            <a:pPr algn="r">
-              <a:defRPr sz="1100" b="0">
-                <a:solidFill>
-                  <a:srgbClr val="FFFFFF"/>
-                </a:solidFill>
-                <a:latin typeface="Calibri"/>
-              </a:defRPr>
-            </a:pPr>
-            <a:r>
-              <a:t>Rs.9,999/month enterprise</a:t>
-            </a:r>
-          </a:p>
-        </p:txBody>
-      </p:sp>
-      <p:sp>
-        <p:nvSpPr>
-          <p:cNvPr id="55" name="Rectangle 54"/>
           <p:cNvSpPr/>
           <p:nvPr/>
         </p:nvSpPr>
@@ -15338,7 +14510,7 @@
       </p:sp>
       <p:sp>
         <p:nvSpPr>
-          <p:cNvPr id="56" name="TextBox 55"/>
+          <p:cNvPr id="53" name="TextBox 52"/>
           <p:cNvSpPr txBox="1"/>
           <p:nvPr/>
         </p:nvSpPr>
@@ -15367,14 +14539,14 @@
               </a:defRPr>
             </a:pPr>
             <a:r>
-              <a:t>Target Market</a:t>
-            </a:r>
-          </a:p>
-        </p:txBody>
-      </p:sp>
-      <p:sp>
-        <p:nvSpPr>
-          <p:cNvPr id="57" name="TextBox 56"/>
+              <a:t>Production (100 NGOs)</a:t>
+            </a:r>
+          </a:p>
+        </p:txBody>
+      </p:sp>
+      <p:sp>
+        <p:nvSpPr>
+          <p:cNvPr id="54" name="TextBox 53"/>
           <p:cNvSpPr txBox="1"/>
           <p:nvPr/>
         </p:nvSpPr>
@@ -15403,14 +14575,14 @@
               </a:defRPr>
             </a:pPr>
             <a:r>
-              <a:t>3M+ civil society orgs</a:t>
-            </a:r>
-          </a:p>
-        </p:txBody>
-      </p:sp>
-      <p:sp>
-        <p:nvSpPr>
-          <p:cNvPr id="58" name="Rectangle 57"/>
+              <a:t>~Rs.17,000/month</a:t>
+            </a:r>
+          </a:p>
+        </p:txBody>
+      </p:sp>
+      <p:sp>
+        <p:nvSpPr>
+          <p:cNvPr id="55" name="Rectangle 54"/>
           <p:cNvSpPr/>
           <p:nvPr/>
         </p:nvSpPr>
@@ -15453,7 +14625,7 @@
       </p:sp>
       <p:sp>
         <p:nvSpPr>
-          <p:cNvPr id="59" name="TextBox 58"/>
+          <p:cNvPr id="56" name="TextBox 55"/>
           <p:cNvSpPr txBox="1"/>
           <p:nvPr/>
         </p:nvSpPr>
@@ -15482,7 +14654,7 @@
               </a:defRPr>
             </a:pPr>
             <a:r>
-              <a:t>AI for Bharat Hackathon 2026  |  Powered by AWS  |  Track 03</a:t>
+              <a:t>Powered by AWS  |  AI for Bharat Hackathon 2026  |  Track 03</a:t>
             </a:r>
           </a:p>
         </p:txBody>
